--- a/docs/presentations/issue-171-external-ai-system-proposal.pptx
+++ b/docs/presentations/issue-171-external-ai-system-proposal.pptx
@@ -3158,7 +3158,7 @@
               </a:defRPr>
             </a:pPr>
             <a:r>
-              <a:t>#171 기반 발표자료 / 외부 AI API 연계형</a:t>
+              <a:t>#171 기준 / 외부 AI API 연계형</a:t>
             </a:r>
           </a:p>
         </p:txBody>
@@ -4061,65 +4061,6 @@
                         <a:defRPr sz="1300" b="0"/>
                       </a:pPr>
                       <a:r>
-                        <a:t>구축 인건비</a:t>
-                      </a:r>
-                    </a:p>
-                  </a:txBody>
-                  <a:tcPr>
-                    <a:solidFill>
-                      <a:srgbClr val="FFFFFF"/>
-                    </a:solidFill>
-                  </a:tcPr>
-                </a:tc>
-                <a:tc>
-                  <a:txBody>
-                    <a:bodyPr/>
-                    <a:lstStyle/>
-                    <a:p>
-                      <a:pPr algn="l">
-                        <a:defRPr sz="1300" b="0"/>
-                      </a:pPr>
-                      <a:r>
-                        <a:t>1,500만 ~ 3,000만원</a:t>
-                      </a:r>
-                    </a:p>
-                  </a:txBody>
-                  <a:tcPr>
-                    <a:solidFill>
-                      <a:srgbClr val="FFFFFF"/>
-                    </a:solidFill>
-                  </a:tcPr>
-                </a:tc>
-                <a:tc>
-                  <a:txBody>
-                    <a:bodyPr/>
-                    <a:lstStyle/>
-                    <a:p>
-                      <a:pPr algn="l">
-                        <a:defRPr sz="1300" b="0"/>
-                      </a:pPr>
-                      <a:r>
-                        <a:t>MVP 2~4주</a:t>
-                      </a:r>
-                    </a:p>
-                  </a:txBody>
-                  <a:tcPr>
-                    <a:solidFill>
-                      <a:srgbClr val="FFFFFF"/>
-                    </a:solidFill>
-                  </a:tcPr>
-                </a:tc>
-              </a:tr>
-              <a:tr h="587828">
-                <a:tc>
-                  <a:txBody>
-                    <a:bodyPr/>
-                    <a:lstStyle/>
-                    <a:p>
-                      <a:pPr algn="l">
-                        <a:defRPr sz="1300" b="0"/>
-                      </a:pPr>
-                      <a:r>
                         <a:t>총 초기 구축비</a:t>
                       </a:r>
                     </a:p>
@@ -4228,7 +4169,7 @@
                   </a:tcPr>
                 </a:tc>
               </a:tr>
-              <a:tr h="587832">
+              <a:tr h="587828">
                 <a:tc>
                   <a:txBody>
                     <a:bodyPr/>
@@ -4257,7 +4198,7 @@
                         <a:defRPr sz="1300" b="0"/>
                       </a:pPr>
                       <a:r>
-                        <a:t>입력 $2.50 / 출력 $15 / 1M tokens</a:t>
+                        <a:t>입력 $2.50 / 출력 $15 / 1M</a:t>
                       </a:r>
                     </a:p>
                   </a:txBody>
@@ -4277,6 +4218,65 @@
                       </a:pPr>
                       <a:r>
                         <a:t>사용량 과금</a:t>
+                      </a:r>
+                    </a:p>
+                  </a:txBody>
+                  <a:tcPr>
+                    <a:solidFill>
+                      <a:srgbClr val="FFFFFF"/>
+                    </a:solidFill>
+                  </a:tcPr>
+                </a:tc>
+              </a:tr>
+              <a:tr h="587832">
+                <a:tc>
+                  <a:txBody>
+                    <a:bodyPr/>
+                    <a:lstStyle/>
+                    <a:p>
+                      <a:pPr algn="l">
+                        <a:defRPr sz="1300" b="0"/>
+                      </a:pPr>
+                      <a:r>
+                        <a:t>월간 운영비</a:t>
+                      </a:r>
+                    </a:p>
+                  </a:txBody>
+                  <a:tcPr>
+                    <a:solidFill>
+                      <a:srgbClr val="FFFFFF"/>
+                    </a:solidFill>
+                  </a:tcPr>
+                </a:tc>
+                <a:tc>
+                  <a:txBody>
+                    <a:bodyPr/>
+                    <a:lstStyle/>
+                    <a:p>
+                      <a:pPr algn="l">
+                        <a:defRPr sz="1300" b="0"/>
+                      </a:pPr>
+                      <a:r>
+                        <a:t>50만 ~ 120만원 + 외부 사용료</a:t>
+                      </a:r>
+                    </a:p>
+                  </a:txBody>
+                  <a:tcPr>
+                    <a:solidFill>
+                      <a:srgbClr val="FFFFFF"/>
+                    </a:solidFill>
+                  </a:tcPr>
+                </a:tc>
+                <a:tc>
+                  <a:txBody>
+                    <a:bodyPr/>
+                    <a:lstStyle/>
+                    <a:p>
+                      <a:pPr algn="l">
+                        <a:defRPr sz="1300" b="0"/>
+                      </a:pPr>
+                      <a:r>
+                        <a:t>인프라 + 외부 AI</a:t>
                       </a:r>
                     </a:p>
                   </a:txBody>
@@ -4522,7 +4522,7 @@
               </a:defRPr>
             </a:pPr>
             <a:r>
-              <a:t>소스/로그 일부가 외부로 전송될 수 있음</a:t>
+              <a:t>소스/로그 일부 외부 전송 가능</a:t>
             </a:r>
           </a:p>
           <a:p>
@@ -4537,7 +4537,7 @@
               </a:defRPr>
             </a:pPr>
             <a:r>
-              <a:t>월별 사용료가 지속 발생</a:t>
+              <a:t>월별 사용료 지속 발생</a:t>
             </a:r>
           </a:p>
           <a:p>

--- a/docs/presentations/issue-171-external-ai-system-proposal.pptx
+++ b/docs/presentations/issue-171-external-ai-system-proposal.pptx
@@ -11,8 +11,33 @@
     <p:sldId id="259" r:id="rId10"/>
     <p:sldId id="260" r:id="rId11"/>
     <p:sldId id="261" r:id="rId12"/>
+    <p:sldId id="262" r:id="rId13"/>
+    <p:sldId id="263" r:id="rId14"/>
+    <p:sldId id="264" r:id="rId15"/>
+    <p:sldId id="265" r:id="rId16"/>
+    <p:sldId id="266" r:id="rId17"/>
+    <p:sldId id="267" r:id="rId18"/>
+    <p:sldId id="268" r:id="rId19"/>
+    <p:sldId id="269" r:id="rId20"/>
+    <p:sldId id="270" r:id="rId21"/>
+    <p:sldId id="271" r:id="rId22"/>
+    <p:sldId id="272" r:id="rId23"/>
+    <p:sldId id="273" r:id="rId24"/>
+    <p:sldId id="274" r:id="rId25"/>
+    <p:sldId id="275" r:id="rId26"/>
+    <p:sldId id="276" r:id="rId27"/>
+    <p:sldId id="277" r:id="rId28"/>
+    <p:sldId id="278" r:id="rId29"/>
+    <p:sldId id="279" r:id="rId30"/>
+    <p:sldId id="280" r:id="rId31"/>
+    <p:sldId id="281" r:id="rId32"/>
+    <p:sldId id="282" r:id="rId33"/>
+    <p:sldId id="283" r:id="rId34"/>
+    <p:sldId id="284" r:id="rId35"/>
+    <p:sldId id="285" r:id="rId36"/>
+    <p:sldId id="286" r:id="rId37"/>
   </p:sldIdLst>
-  <p:sldSz cx="12191695" cy="6858000" type="screen4x3"/>
+  <p:sldSz cx="9144000" cy="6858000" type="screen4x3"/>
   <p:notesSz cx="6858000" cy="9144000"/>
   <p:defaultTextStyle>
     <a:defPPr>
@@ -3095,33 +3120,19 @@
       <p:grpSpPr/>
       <p:sp>
         <p:nvSpPr>
-          <p:cNvPr id="2" name="TextBox 1"/>
-          <p:cNvSpPr txBox="1"/>
-          <p:nvPr/>
-        </p:nvSpPr>
-        <p:spPr>
-          <a:xfrm>
-            <a:off x="457200" y="274320"/>
-            <a:ext cx="11247120" cy="640080"/>
-          </a:xfrm>
-          <a:prstGeom prst="rect">
-            <a:avLst/>
-          </a:prstGeom>
-          <a:noFill/>
-        </p:spPr>
-        <p:txBody>
-          <a:bodyPr wrap="none">
-            <a:spAutoFit/>
-          </a:bodyPr>
-          <a:lstStyle/>
-          <a:p>
-            <a:pPr>
-              <a:defRPr sz="2600" b="1">
-                <a:solidFill>
-                  <a:srgbClr val="1F4E79"/>
-                </a:solidFill>
-              </a:defRPr>
-            </a:pPr>
+          <p:cNvPr id="2" name="Title 1"/>
+          <p:cNvSpPr>
+            <a:spLocks noGrp="1"/>
+          </p:cNvSpPr>
+          <p:nvPr>
+            <p:ph type="ctrTitle"/>
+          </p:nvPr>
+        </p:nvSpPr>
+        <p:spPr/>
+        <p:txBody>
+          <a:bodyPr/>
+          <a:lstStyle/>
+          <a:p>
             <a:r>
               <a:t>외부망 연계 AI 개발지원 시스템 구축 검토안</a:t>
             </a:r>
@@ -3130,118 +3141,1061 @@
       </p:sp>
       <p:sp>
         <p:nvSpPr>
-          <p:cNvPr id="3" name="TextBox 2"/>
-          <p:cNvSpPr txBox="1"/>
-          <p:nvPr/>
-        </p:nvSpPr>
-        <p:spPr>
-          <a:xfrm>
-            <a:off x="457200" y="914400"/>
-            <a:ext cx="11247120" cy="457200"/>
-          </a:xfrm>
-          <a:prstGeom prst="rect">
-            <a:avLst/>
-          </a:prstGeom>
-          <a:noFill/>
-        </p:spPr>
-        <p:txBody>
-          <a:bodyPr wrap="none">
-            <a:spAutoFit/>
-          </a:bodyPr>
-          <a:lstStyle/>
-          <a:p>
-            <a:pPr>
-              <a:defRPr sz="1200">
-                <a:solidFill>
-                  <a:srgbClr val="5A5A5A"/>
-                </a:solidFill>
-              </a:defRPr>
-            </a:pPr>
-            <a:r>
-              <a:t>#171 기준 / 외부 AI API 연계형</a:t>
-            </a:r>
-          </a:p>
-        </p:txBody>
-      </p:sp>
-      <p:sp>
-        <p:nvSpPr>
-          <p:cNvPr id="4" name="TextBox 3"/>
-          <p:cNvSpPr txBox="1"/>
-          <p:nvPr/>
-        </p:nvSpPr>
-        <p:spPr>
-          <a:xfrm>
-            <a:off x="731520" y="1554480"/>
-            <a:ext cx="10515600" cy="4572000"/>
-          </a:xfrm>
-          <a:prstGeom prst="rect">
-            <a:avLst/>
-          </a:prstGeom>
-          <a:noFill/>
-        </p:spPr>
-        <p:txBody>
-          <a:bodyPr wrap="none">
-            <a:spAutoFit/>
-          </a:bodyPr>
-          <a:lstStyle/>
-          <a:p>
-            <a:pPr>
-              <a:spcAft>
-                <a:spcPts val="1000"/>
-              </a:spcAft>
-              <a:defRPr sz="2100">
-                <a:solidFill>
-                  <a:srgbClr val="000000"/>
-                </a:solidFill>
-              </a:defRPr>
-            </a:pPr>
-            <a:r>
-              <a:t>목표: 내부 Git/Jenkins는 유지하고 AI만 외부 서비스 활용</a:t>
-            </a:r>
-          </a:p>
-          <a:p>
-            <a:pPr>
-              <a:spcAft>
-                <a:spcPts val="1000"/>
-              </a:spcAft>
-              <a:defRPr sz="2100">
-                <a:solidFill>
-                  <a:srgbClr val="000000"/>
-                </a:solidFill>
-              </a:defRPr>
-            </a:pPr>
-            <a:r>
-              <a:t>구성: CPU 서버 1대 + 외부 AI API/SaaS 연계</a:t>
-            </a:r>
-          </a:p>
-          <a:p>
-            <a:pPr>
-              <a:spcAft>
-                <a:spcPts val="1000"/>
-              </a:spcAft>
-              <a:defRPr sz="2100">
-                <a:solidFill>
-                  <a:srgbClr val="000000"/>
-                </a:solidFill>
-              </a:defRPr>
-            </a:pPr>
-            <a:r>
-              <a:t>장점: 초기 구축비 절감, 최신 모델 즉시 활용</a:t>
-            </a:r>
-          </a:p>
-          <a:p>
-            <a:pPr>
-              <a:spcAft>
-                <a:spcPts val="1000"/>
-              </a:spcAft>
-              <a:defRPr sz="2100">
-                <a:solidFill>
-                  <a:srgbClr val="000000"/>
-                </a:solidFill>
-              </a:defRPr>
-            </a:pPr>
-            <a:r>
-              <a:t>핵심 조건: 데이터 전송 범위 통제 + 외부 사용료 관리</a:t>
+          <p:cNvPr id="3" name="Subtitle 2"/>
+          <p:cNvSpPr>
+            <a:spLocks noGrp="1"/>
+          </p:cNvSpPr>
+          <p:nvPr>
+            <p:ph type="subTitle" idx="1"/>
+          </p:nvPr>
+        </p:nvSpPr>
+        <p:spPr/>
+        <p:txBody>
+          <a:bodyPr/>
+          <a:lstStyle/>
+          <a:p>
+            <a:r>
+              <a:t>https://github.com/SeoArin9142/GameChatTranslator/issues/171</a:t>
+            </a:r>
+          </a:p>
+        </p:txBody>
+      </p:sp>
+    </p:spTree>
+  </p:cSld>
+  <p:clrMapOvr>
+    <a:masterClrMapping/>
+  </p:clrMapOvr>
+</p:sld>
+</file>
+
+<file path=ppt/slides/slide10.xml><?xml version="1.0" encoding="utf-8"?>
+<p:sld xmlns:a="http://schemas.openxmlformats.org/drawingml/2006/main" xmlns:p="http://schemas.openxmlformats.org/presentationml/2006/main" xmlns:r="http://schemas.openxmlformats.org/officeDocument/2006/relationships">
+  <p:cSld>
+    <p:spTree>
+      <p:nvGrpSpPr>
+        <p:cNvPr id="1" name=""/>
+        <p:cNvGrpSpPr/>
+        <p:nvPr/>
+      </p:nvGrpSpPr>
+      <p:grpSpPr/>
+      <p:sp>
+        <p:nvSpPr>
+          <p:cNvPr id="2" name="Title 1"/>
+          <p:cNvSpPr>
+            <a:spLocks noGrp="1"/>
+          </p:cNvSpPr>
+          <p:nvPr>
+            <p:ph type="title"/>
+          </p:nvPr>
+        </p:nvSpPr>
+        <p:spPr/>
+        <p:txBody>
+          <a:bodyPr/>
+          <a:lstStyle/>
+          <a:p>
+            <a:r>
+              <a:t>3. 예상 비용 (6/6)</a:t>
+            </a:r>
+          </a:p>
+        </p:txBody>
+      </p:sp>
+      <p:sp>
+        <p:nvSpPr>
+          <p:cNvPr id="3" name="Content Placeholder 2"/>
+          <p:cNvSpPr>
+            <a:spLocks noGrp="1"/>
+          </p:cNvSpPr>
+          <p:nvPr>
+            <p:ph idx="1"/>
+          </p:nvPr>
+        </p:nvSpPr>
+        <p:spPr/>
+        <p:txBody>
+          <a:bodyPr wrap="square"/>
+          <a:lstStyle/>
+          <a:p>
+            <a:pPr algn="l"/>
+            <a:r>
+              <a:rPr sz="1600"/>
+              <a:t>대신 외부 AI 사용료가 매월 발생</a:t>
+            </a:r>
+          </a:p>
+          <a:p>
+            <a:pPr algn="l"/>
+            <a:r>
+              <a:rPr sz="1600"/>
+              <a:t>보안/계약/데이터 반출 통제가 가능한 경우에만 적합</a:t>
+            </a:r>
+          </a:p>
+        </p:txBody>
+      </p:sp>
+    </p:spTree>
+  </p:cSld>
+  <p:clrMapOvr>
+    <a:masterClrMapping/>
+  </p:clrMapOvr>
+</p:sld>
+</file>
+
+<file path=ppt/slides/slide11.xml><?xml version="1.0" encoding="utf-8"?>
+<p:sld xmlns:a="http://schemas.openxmlformats.org/drawingml/2006/main" xmlns:p="http://schemas.openxmlformats.org/presentationml/2006/main" xmlns:r="http://schemas.openxmlformats.org/officeDocument/2006/relationships">
+  <p:cSld>
+    <p:spTree>
+      <p:nvGrpSpPr>
+        <p:cNvPr id="1" name=""/>
+        <p:cNvGrpSpPr/>
+        <p:nvPr/>
+      </p:nvGrpSpPr>
+      <p:grpSpPr/>
+      <p:sp>
+        <p:nvSpPr>
+          <p:cNvPr id="2" name="Title 1"/>
+          <p:cNvSpPr>
+            <a:spLocks noGrp="1"/>
+          </p:cNvSpPr>
+          <p:nvPr>
+            <p:ph type="title"/>
+          </p:nvPr>
+        </p:nvSpPr>
+        <p:spPr/>
+        <p:txBody>
+          <a:bodyPr/>
+          <a:lstStyle/>
+          <a:p>
+            <a:r>
+              <a:t>4. 구축 방법 (1/2)</a:t>
+            </a:r>
+          </a:p>
+        </p:txBody>
+      </p:sp>
+      <p:sp>
+        <p:nvSpPr>
+          <p:cNvPr id="3" name="Content Placeholder 2"/>
+          <p:cNvSpPr>
+            <a:spLocks noGrp="1"/>
+          </p:cNvSpPr>
+          <p:nvPr>
+            <p:ph idx="1"/>
+          </p:nvPr>
+        </p:nvSpPr>
+        <p:spPr/>
+        <p:txBody>
+          <a:bodyPr wrap="square"/>
+          <a:lstStyle/>
+          <a:p>
+            <a:pPr algn="l"/>
+            <a:r>
+              <a:rPr sz="1600"/>
+              <a:t>### 단계별 구축</a:t>
+            </a:r>
+          </a:p>
+          <a:p>
+            <a:pPr algn="l"/>
+            <a:r>
+              <a:rPr sz="1600"/>
+              <a:t>#### 1단계: Reviewer 우선 도입</a:t>
+            </a:r>
+          </a:p>
+          <a:p>
+            <a:pPr algn="l"/>
+            <a:r>
+              <a:rPr sz="1600"/>
+              <a:t>diff 읽기</a:t>
+            </a:r>
+          </a:p>
+          <a:p>
+            <a:pPr algn="l"/>
+            <a:r>
+              <a:rPr sz="1600"/>
+              <a:t>테스트 실행</a:t>
+            </a:r>
+          </a:p>
+          <a:p>
+            <a:pPr algn="l"/>
+            <a:r>
+              <a:rPr sz="1600"/>
+              <a:t>리뷰 결과 생성</a:t>
+            </a:r>
+          </a:p>
+          <a:p>
+            <a:pPr algn="l"/>
+            <a:r>
+              <a:rPr sz="1600"/>
+              <a:t>외부 AI API 연동</a:t>
+            </a:r>
+          </a:p>
+          <a:p>
+            <a:pPr algn="l"/>
+            <a:r>
+              <a:rPr sz="1600"/>
+              <a:t>#### 2단계: Owner 기능 추가</a:t>
+            </a:r>
+          </a:p>
+          <a:p>
+            <a:pPr algn="l"/>
+            <a:r>
+              <a:rPr sz="1600"/>
+              <a:t>작업 브랜치 수정</a:t>
+            </a:r>
+          </a:p>
+          <a:p>
+            <a:pPr algn="l"/>
+            <a:r>
+              <a:rPr sz="1600"/>
+              <a:t>테스트 실행</a:t>
+            </a:r>
+          </a:p>
+          <a:p>
+            <a:pPr algn="l"/>
+            <a:r>
+              <a:rPr sz="1600"/>
+              <a:t>PR 생성</a:t>
+            </a:r>
+          </a:p>
+        </p:txBody>
+      </p:sp>
+    </p:spTree>
+  </p:cSld>
+  <p:clrMapOvr>
+    <a:masterClrMapping/>
+  </p:clrMapOvr>
+</p:sld>
+</file>
+
+<file path=ppt/slides/slide12.xml><?xml version="1.0" encoding="utf-8"?>
+<p:sld xmlns:a="http://schemas.openxmlformats.org/drawingml/2006/main" xmlns:p="http://schemas.openxmlformats.org/presentationml/2006/main" xmlns:r="http://schemas.openxmlformats.org/officeDocument/2006/relationships">
+  <p:cSld>
+    <p:spTree>
+      <p:nvGrpSpPr>
+        <p:cNvPr id="1" name=""/>
+        <p:cNvGrpSpPr/>
+        <p:nvPr/>
+      </p:nvGrpSpPr>
+      <p:grpSpPr/>
+      <p:sp>
+        <p:nvSpPr>
+          <p:cNvPr id="2" name="Title 1"/>
+          <p:cNvSpPr>
+            <a:spLocks noGrp="1"/>
+          </p:cNvSpPr>
+          <p:nvPr>
+            <p:ph type="title"/>
+          </p:nvPr>
+        </p:nvSpPr>
+        <p:spPr/>
+        <p:txBody>
+          <a:bodyPr/>
+          <a:lstStyle/>
+          <a:p>
+            <a:r>
+              <a:t>4. 구축 방법 (2/2)</a:t>
+            </a:r>
+          </a:p>
+        </p:txBody>
+      </p:sp>
+      <p:sp>
+        <p:nvSpPr>
+          <p:cNvPr id="3" name="Content Placeholder 2"/>
+          <p:cNvSpPr>
+            <a:spLocks noGrp="1"/>
+          </p:cNvSpPr>
+          <p:nvPr>
+            <p:ph idx="1"/>
+          </p:nvPr>
+        </p:nvSpPr>
+        <p:spPr/>
+        <p:txBody>
+          <a:bodyPr wrap="square"/>
+          <a:lstStyle/>
+          <a:p>
+            <a:pPr algn="l"/>
+            <a:r>
+              <a:rPr sz="1600"/>
+              <a:t>#### 3단계: 승인/반려 루프 구축</a:t>
+            </a:r>
+          </a:p>
+          <a:p>
+            <a:pPr algn="l"/>
+            <a:r>
+              <a:rPr sz="1600"/>
+              <a:t>Owner 작업 -&gt; Reviewer 검토 -&gt; 승인/반려</a:t>
+            </a:r>
+          </a:p>
+          <a:p>
+            <a:pPr algn="l"/>
+            <a:r>
+              <a:rPr sz="1600"/>
+              <a:t>재작업 자동화</a:t>
+            </a:r>
+          </a:p>
+          <a:p>
+            <a:pPr algn="l"/>
+            <a:r>
+              <a:rPr sz="1600"/>
+              <a:t>#### 4단계: 확대 적용</a:t>
+            </a:r>
+          </a:p>
+          <a:p>
+            <a:pPr algn="l"/>
+            <a:r>
+              <a:rPr sz="1600"/>
+              <a:t>팀별 workspace 분리</a:t>
+            </a:r>
+          </a:p>
+          <a:p>
+            <a:pPr algn="l"/>
+            <a:r>
+              <a:rPr sz="1600"/>
+              <a:t>여러 저장소 확장</a:t>
+            </a:r>
+          </a:p>
+          <a:p>
+            <a:pPr algn="l"/>
+            <a:r>
+              <a:rPr sz="1600"/>
+              <a:t>필요 시 Arbiter AI 도입</a:t>
+            </a:r>
+          </a:p>
+        </p:txBody>
+      </p:sp>
+    </p:spTree>
+  </p:cSld>
+  <p:clrMapOvr>
+    <a:masterClrMapping/>
+  </p:clrMapOvr>
+</p:sld>
+</file>
+
+<file path=ppt/slides/slide13.xml><?xml version="1.0" encoding="utf-8"?>
+<p:sld xmlns:a="http://schemas.openxmlformats.org/drawingml/2006/main" xmlns:p="http://schemas.openxmlformats.org/presentationml/2006/main" xmlns:r="http://schemas.openxmlformats.org/officeDocument/2006/relationships">
+  <p:cSld>
+    <p:spTree>
+      <p:nvGrpSpPr>
+        <p:cNvPr id="1" name=""/>
+        <p:cNvGrpSpPr/>
+        <p:nvPr/>
+      </p:nvGrpSpPr>
+      <p:grpSpPr/>
+      <p:sp>
+        <p:nvSpPr>
+          <p:cNvPr id="2" name="Title 1"/>
+          <p:cNvSpPr>
+            <a:spLocks noGrp="1"/>
+          </p:cNvSpPr>
+          <p:nvPr>
+            <p:ph type="title"/>
+          </p:nvPr>
+        </p:nvSpPr>
+        <p:spPr/>
+        <p:txBody>
+          <a:bodyPr/>
+          <a:lstStyle/>
+          <a:p>
+            <a:r>
+              <a:t>5. 장점</a:t>
+            </a:r>
+          </a:p>
+        </p:txBody>
+      </p:sp>
+      <p:sp>
+        <p:nvSpPr>
+          <p:cNvPr id="3" name="Content Placeholder 2"/>
+          <p:cNvSpPr>
+            <a:spLocks noGrp="1"/>
+          </p:cNvSpPr>
+          <p:nvPr>
+            <p:ph idx="1"/>
+          </p:nvPr>
+        </p:nvSpPr>
+        <p:spPr/>
+        <p:txBody>
+          <a:bodyPr wrap="square"/>
+          <a:lstStyle/>
+          <a:p>
+            <a:pPr algn="l"/>
+            <a:r>
+              <a:rPr sz="1600"/>
+              <a:t>초기 인프라 비용이 폐쇄망 GPU 서버 방식보다 낮음</a:t>
+            </a:r>
+          </a:p>
+          <a:p>
+            <a:pPr algn="l"/>
+            <a:r>
+              <a:rPr sz="1600"/>
+              <a:t>GPU 서버 없이도 시작 가능</a:t>
+            </a:r>
+          </a:p>
+          <a:p>
+            <a:pPr algn="l"/>
+            <a:r>
+              <a:rPr sz="1600"/>
+              <a:t>최신 상용 모델을 바로 활용 가능</a:t>
+            </a:r>
+          </a:p>
+          <a:p>
+            <a:pPr algn="l"/>
+            <a:r>
+              <a:rPr sz="1600"/>
+              <a:t>도입 속도가 빠름</a:t>
+            </a:r>
+          </a:p>
+          <a:p>
+            <a:pPr algn="l"/>
+            <a:r>
+              <a:rPr sz="1600"/>
+              <a:t>운영 난이도가 상대적으로 낮음</a:t>
+            </a:r>
+          </a:p>
+        </p:txBody>
+      </p:sp>
+    </p:spTree>
+  </p:cSld>
+  <p:clrMapOvr>
+    <a:masterClrMapping/>
+  </p:clrMapOvr>
+</p:sld>
+</file>
+
+<file path=ppt/slides/slide14.xml><?xml version="1.0" encoding="utf-8"?>
+<p:sld xmlns:a="http://schemas.openxmlformats.org/drawingml/2006/main" xmlns:p="http://schemas.openxmlformats.org/presentationml/2006/main" xmlns:r="http://schemas.openxmlformats.org/officeDocument/2006/relationships">
+  <p:cSld>
+    <p:spTree>
+      <p:nvGrpSpPr>
+        <p:cNvPr id="1" name=""/>
+        <p:cNvGrpSpPr/>
+        <p:nvPr/>
+      </p:nvGrpSpPr>
+      <p:grpSpPr/>
+      <p:sp>
+        <p:nvSpPr>
+          <p:cNvPr id="2" name="Title 1"/>
+          <p:cNvSpPr>
+            <a:spLocks noGrp="1"/>
+          </p:cNvSpPr>
+          <p:nvPr>
+            <p:ph type="title"/>
+          </p:nvPr>
+        </p:nvSpPr>
+        <p:spPr/>
+        <p:txBody>
+          <a:bodyPr/>
+          <a:lstStyle/>
+          <a:p>
+            <a:r>
+              <a:t>6. 단점 및 리스크 (1/2)</a:t>
+            </a:r>
+          </a:p>
+        </p:txBody>
+      </p:sp>
+      <p:sp>
+        <p:nvSpPr>
+          <p:cNvPr id="3" name="Content Placeholder 2"/>
+          <p:cNvSpPr>
+            <a:spLocks noGrp="1"/>
+          </p:cNvSpPr>
+          <p:nvPr>
+            <p:ph idx="1"/>
+          </p:nvPr>
+        </p:nvSpPr>
+        <p:spPr/>
+        <p:txBody>
+          <a:bodyPr wrap="square"/>
+          <a:lstStyle/>
+          <a:p>
+            <a:pPr algn="l"/>
+            <a:r>
+              <a:rPr sz="1600"/>
+              <a:t>소스/로그 일부가 외부 AI 서비스로 전송될 수 있음</a:t>
+            </a:r>
+          </a:p>
+          <a:p>
+            <a:pPr algn="l"/>
+            <a:r>
+              <a:rPr sz="1600"/>
+              <a:t>계약/보안/개인정보/반출 통제 검토 필요</a:t>
+            </a:r>
+          </a:p>
+          <a:p>
+            <a:pPr algn="l"/>
+            <a:r>
+              <a:rPr sz="1600"/>
+              <a:t>API 사용량 증가 시 월 비용이 지속적으로 증가</a:t>
+            </a:r>
+          </a:p>
+          <a:p>
+            <a:pPr algn="l"/>
+            <a:r>
+              <a:rPr sz="1600"/>
+              <a:t>외부 서비스 장애 시 업무 영향 가능</a:t>
+            </a:r>
+          </a:p>
+          <a:p>
+            <a:pPr algn="l"/>
+            <a:r>
+              <a:rPr sz="1600"/>
+              <a:t>AI 결과를 사람이 최종 검토해야 함</a:t>
+            </a:r>
+          </a:p>
+          <a:p>
+            <a:pPr algn="l"/>
+            <a:r>
+              <a:rPr sz="1600"/>
+              <a:t>### 대응 방안</a:t>
+            </a:r>
+          </a:p>
+          <a:p>
+            <a:pPr algn="l"/>
+            <a:r>
+              <a:rPr sz="1600"/>
+              <a:t>전송 가능한 데이터 범위 문서화</a:t>
+            </a:r>
+          </a:p>
+          <a:p>
+            <a:pPr algn="l"/>
+            <a:r>
+              <a:rPr sz="1600"/>
+              <a:t>민감 저장소 제외 정책 적용</a:t>
+            </a:r>
+          </a:p>
+          <a:p>
+            <a:pPr algn="l"/>
+            <a:r>
+              <a:rPr sz="1600"/>
+              <a:t>branch/PR 기반 운영</a:t>
+            </a:r>
+          </a:p>
+          <a:p>
+            <a:pPr algn="l"/>
+            <a:r>
+              <a:rPr sz="1600"/>
+              <a:t>Jenkins 결과 없는 완료 금지</a:t>
+            </a:r>
+          </a:p>
+        </p:txBody>
+      </p:sp>
+    </p:spTree>
+  </p:cSld>
+  <p:clrMapOvr>
+    <a:masterClrMapping/>
+  </p:clrMapOvr>
+</p:sld>
+</file>
+
+<file path=ppt/slides/slide15.xml><?xml version="1.0" encoding="utf-8"?>
+<p:sld xmlns:a="http://schemas.openxmlformats.org/drawingml/2006/main" xmlns:p="http://schemas.openxmlformats.org/presentationml/2006/main" xmlns:r="http://schemas.openxmlformats.org/officeDocument/2006/relationships">
+  <p:cSld>
+    <p:spTree>
+      <p:nvGrpSpPr>
+        <p:cNvPr id="1" name=""/>
+        <p:cNvGrpSpPr/>
+        <p:nvPr/>
+      </p:nvGrpSpPr>
+      <p:grpSpPr/>
+      <p:sp>
+        <p:nvSpPr>
+          <p:cNvPr id="2" name="Title 1"/>
+          <p:cNvSpPr>
+            <a:spLocks noGrp="1"/>
+          </p:cNvSpPr>
+          <p:nvPr>
+            <p:ph type="title"/>
+          </p:nvPr>
+        </p:nvSpPr>
+        <p:spPr/>
+        <p:txBody>
+          <a:bodyPr/>
+          <a:lstStyle/>
+          <a:p>
+            <a:r>
+              <a:t>6. 단점 및 리스크 (2/2)</a:t>
+            </a:r>
+          </a:p>
+        </p:txBody>
+      </p:sp>
+      <p:sp>
+        <p:nvSpPr>
+          <p:cNvPr id="3" name="Content Placeholder 2"/>
+          <p:cNvSpPr>
+            <a:spLocks noGrp="1"/>
+          </p:cNvSpPr>
+          <p:nvPr>
+            <p:ph idx="1"/>
+          </p:nvPr>
+        </p:nvSpPr>
+        <p:spPr/>
+        <p:txBody>
+          <a:bodyPr wrap="square"/>
+          <a:lstStyle/>
+          <a:p>
+            <a:pPr algn="l"/>
+            <a:r>
+              <a:rPr sz="1600"/>
+              <a:t>작업 이력/승인 이력 전부 기록</a:t>
+            </a:r>
+          </a:p>
+          <a:p>
+            <a:pPr algn="l"/>
+            <a:r>
+              <a:rPr sz="1600"/>
+              <a:t>외부 AI 장애 시 Reviewer-only 또는 수동 모드 fallback 준비</a:t>
+            </a:r>
+          </a:p>
+        </p:txBody>
+      </p:sp>
+    </p:spTree>
+  </p:cSld>
+  <p:clrMapOvr>
+    <a:masterClrMapping/>
+  </p:clrMapOvr>
+</p:sld>
+</file>
+
+<file path=ppt/slides/slide16.xml><?xml version="1.0" encoding="utf-8"?>
+<p:sld xmlns:a="http://schemas.openxmlformats.org/drawingml/2006/main" xmlns:p="http://schemas.openxmlformats.org/presentationml/2006/main" xmlns:r="http://schemas.openxmlformats.org/officeDocument/2006/relationships">
+  <p:cSld>
+    <p:spTree>
+      <p:nvGrpSpPr>
+        <p:cNvPr id="1" name=""/>
+        <p:cNvGrpSpPr/>
+        <p:nvPr/>
+      </p:nvGrpSpPr>
+      <p:grpSpPr/>
+      <p:sp>
+        <p:nvSpPr>
+          <p:cNvPr id="2" name="Title 1"/>
+          <p:cNvSpPr>
+            <a:spLocks noGrp="1"/>
+          </p:cNvSpPr>
+          <p:nvPr>
+            <p:ph type="title"/>
+          </p:nvPr>
+        </p:nvSpPr>
+        <p:spPr/>
+        <p:txBody>
+          <a:bodyPr/>
+          <a:lstStyle/>
+          <a:p>
+            <a:r>
+              <a:t>7. 어떻게 사용하는지</a:t>
+            </a:r>
+          </a:p>
+        </p:txBody>
+      </p:sp>
+      <p:sp>
+        <p:nvSpPr>
+          <p:cNvPr id="3" name="Content Placeholder 2"/>
+          <p:cNvSpPr>
+            <a:spLocks noGrp="1"/>
+          </p:cNvSpPr>
+          <p:nvPr>
+            <p:ph idx="1"/>
+          </p:nvPr>
+        </p:nvSpPr>
+        <p:spPr/>
+        <p:txBody>
+          <a:bodyPr wrap="square"/>
+          <a:lstStyle/>
+          <a:p>
+            <a:pPr algn="l"/>
+            <a:r>
+              <a:rPr sz="1600"/>
+              <a:t>1. 개발자가 작업 생성</a:t>
+            </a:r>
+          </a:p>
+          <a:p>
+            <a:pPr algn="l"/>
+            <a:r>
+              <a:rPr sz="1600"/>
+              <a:t>2. 시스템이 workspace 할당</a:t>
+            </a:r>
+          </a:p>
+          <a:p>
+            <a:pPr algn="l"/>
+            <a:r>
+              <a:rPr sz="1600"/>
+              <a:t>3. Owner AI가 외부 AI 서비스 호출 후 코드 수정 및 테스트 수행</a:t>
+            </a:r>
+          </a:p>
+          <a:p>
+            <a:pPr algn="l"/>
+            <a:r>
+              <a:rPr sz="1600"/>
+              <a:t>4. Jenkins가 빌드/테스트 실행</a:t>
+            </a:r>
+          </a:p>
+          <a:p>
+            <a:pPr algn="l"/>
+            <a:r>
+              <a:rPr sz="1600"/>
+              <a:t>5. Reviewer AI가 외부 AI 서비스 호출 후 결과 검토</a:t>
+            </a:r>
+          </a:p>
+          <a:p>
+            <a:pPr algn="l"/>
+            <a:r>
+              <a:rPr sz="1600"/>
+              <a:t>6. 승인 시 PR 유지, 반려 시 재작업</a:t>
+            </a:r>
+          </a:p>
+          <a:p>
+            <a:pPr algn="l"/>
+            <a:r>
+              <a:rPr sz="1600"/>
+              <a:t>즉, 개발자를 대체하는 구조가 아니라</a:t>
+            </a:r>
+          </a:p>
+          <a:p>
+            <a:pPr algn="l"/>
+            <a:r>
+              <a:rPr sz="1600"/>
+              <a:t>**개발자의 반복 작업을 줄이고 검토 보조를 제공하는 구조**로 운영합니다.</a:t>
+            </a:r>
+          </a:p>
+        </p:txBody>
+      </p:sp>
+    </p:spTree>
+  </p:cSld>
+  <p:clrMapOvr>
+    <a:masterClrMapping/>
+  </p:clrMapOvr>
+</p:sld>
+</file>
+
+<file path=ppt/slides/slide17.xml><?xml version="1.0" encoding="utf-8"?>
+<p:sld xmlns:a="http://schemas.openxmlformats.org/drawingml/2006/main" xmlns:p="http://schemas.openxmlformats.org/presentationml/2006/main" xmlns:r="http://schemas.openxmlformats.org/officeDocument/2006/relationships">
+  <p:cSld>
+    <p:spTree>
+      <p:nvGrpSpPr>
+        <p:cNvPr id="1" name=""/>
+        <p:cNvGrpSpPr/>
+        <p:nvPr/>
+      </p:nvGrpSpPr>
+      <p:grpSpPr/>
+      <p:sp>
+        <p:nvSpPr>
+          <p:cNvPr id="2" name="Title 1"/>
+          <p:cNvSpPr>
+            <a:spLocks noGrp="1"/>
+          </p:cNvSpPr>
+          <p:nvPr>
+            <p:ph type="title"/>
+          </p:nvPr>
+        </p:nvSpPr>
+        <p:spPr/>
+        <p:txBody>
+          <a:bodyPr/>
+          <a:lstStyle/>
+          <a:p>
+            <a:r>
+              <a:t>8. 필요한 장비 (1/2)</a:t>
+            </a:r>
+          </a:p>
+        </p:txBody>
+      </p:sp>
+      <p:sp>
+        <p:nvSpPr>
+          <p:cNvPr id="3" name="Content Placeholder 2"/>
+          <p:cNvSpPr>
+            <a:spLocks noGrp="1"/>
+          </p:cNvSpPr>
+          <p:nvPr>
+            <p:ph idx="1"/>
+          </p:nvPr>
+        </p:nvSpPr>
+        <p:spPr/>
+        <p:txBody>
+          <a:bodyPr wrap="square"/>
+          <a:lstStyle/>
+          <a:p>
+            <a:pPr algn="l"/>
+            <a:r>
+              <a:rPr sz="1600"/>
+              <a:t>### 최소 권장 장비</a:t>
+            </a:r>
+          </a:p>
+          <a:p>
+            <a:pPr algn="l"/>
+            <a:r>
+              <a:rPr sz="1600"/>
+              <a:t>**CPU 서버 1대**</a:t>
+            </a:r>
+          </a:p>
+          <a:p>
+            <a:pPr algn="l"/>
+            <a:r>
+              <a:rPr sz="1600"/>
+              <a:t>내부 Git 서버</a:t>
+            </a:r>
+          </a:p>
+          <a:p>
+            <a:pPr algn="l"/>
+            <a:r>
+              <a:rPr sz="1600"/>
+              <a:t>Jenkins Controller</a:t>
+            </a:r>
+          </a:p>
+          <a:p>
+            <a:pPr algn="l"/>
+            <a:r>
+              <a:rPr sz="1600"/>
+              <a:t>오케스트레이터 운영</a:t>
+            </a:r>
+          </a:p>
+          <a:p>
+            <a:pPr algn="l"/>
+            <a:r>
+              <a:rPr sz="1600"/>
+              <a:t>NAS 또는 백업 스토리지</a:t>
+            </a:r>
+          </a:p>
+          <a:p>
+            <a:pPr algn="l"/>
+            <a:r>
+              <a:rPr sz="1600"/>
+              <a:t>UPS</a:t>
+            </a:r>
+          </a:p>
+          <a:p>
+            <a:pPr algn="l"/>
+            <a:r>
+              <a:rPr sz="1600"/>
+              <a:t>외부 AI API 사용 가능한 네트워크 정책</a:t>
+            </a:r>
+          </a:p>
+          <a:p>
+            <a:pPr algn="l"/>
+            <a:r>
+              <a:rPr sz="1600"/>
+              <a:t>### 권장 운영 장비 구성</a:t>
+            </a:r>
+          </a:p>
+          <a:p>
+            <a:pPr algn="l"/>
+            <a:r>
+              <a:rPr sz="1600"/>
+              <a:t>**CPU 서버 1대 + 내부 백업 장비**</a:t>
+            </a:r>
+          </a:p>
+        </p:txBody>
+      </p:sp>
+    </p:spTree>
+  </p:cSld>
+  <p:clrMapOvr>
+    <a:masterClrMapping/>
+  </p:clrMapOvr>
+</p:sld>
+</file>
+
+<file path=ppt/slides/slide18.xml><?xml version="1.0" encoding="utf-8"?>
+<p:sld xmlns:a="http://schemas.openxmlformats.org/drawingml/2006/main" xmlns:p="http://schemas.openxmlformats.org/presentationml/2006/main" xmlns:r="http://schemas.openxmlformats.org/officeDocument/2006/relationships">
+  <p:cSld>
+    <p:spTree>
+      <p:nvGrpSpPr>
+        <p:cNvPr id="1" name=""/>
+        <p:cNvGrpSpPr/>
+        <p:nvPr/>
+      </p:nvGrpSpPr>
+      <p:grpSpPr/>
+      <p:sp>
+        <p:nvSpPr>
+          <p:cNvPr id="2" name="Title 1"/>
+          <p:cNvSpPr>
+            <a:spLocks noGrp="1"/>
+          </p:cNvSpPr>
+          <p:nvPr>
+            <p:ph type="title"/>
+          </p:nvPr>
+        </p:nvSpPr>
+        <p:spPr/>
+        <p:txBody>
+          <a:bodyPr/>
+          <a:lstStyle/>
+          <a:p>
+            <a:r>
+              <a:t>8. 필요한 장비 (2/2)</a:t>
+            </a:r>
+          </a:p>
+        </p:txBody>
+      </p:sp>
+      <p:sp>
+        <p:nvSpPr>
+          <p:cNvPr id="3" name="Content Placeholder 2"/>
+          <p:cNvSpPr>
+            <a:spLocks noGrp="1"/>
+          </p:cNvSpPr>
+          <p:nvPr>
+            <p:ph idx="1"/>
+          </p:nvPr>
+        </p:nvSpPr>
+        <p:spPr/>
+        <p:txBody>
+          <a:bodyPr wrap="square"/>
+          <a:lstStyle/>
+          <a:p>
+            <a:pPr algn="l"/>
+            <a:r>
+              <a:rPr sz="1600"/>
+              <a:t>팀 1개 / 저장소 1개 MVP 운영 가능 수준</a:t>
+            </a:r>
+          </a:p>
+          <a:p>
+            <a:pPr algn="l"/>
+            <a:r>
+              <a:rPr sz="1600"/>
+              <a:t>외부 AI 연동을 위한 방화벽/프록시 정책 필요</a:t>
+            </a:r>
+          </a:p>
+          <a:p>
+            <a:pPr algn="l"/>
+            <a:r>
+              <a:rPr sz="1600"/>
+              <a:t>### 운영 환경</a:t>
+            </a:r>
+          </a:p>
+          <a:p>
+            <a:pPr algn="l"/>
+            <a:r>
+              <a:rPr sz="1600"/>
+              <a:t>내부 Git/Jenkins 유지</a:t>
+            </a:r>
+          </a:p>
+          <a:p>
+            <a:pPr algn="l"/>
+            <a:r>
+              <a:rPr sz="1600"/>
+              <a:t>외부 AI 서비스 호출 가능 환경</a:t>
+            </a:r>
+          </a:p>
+          <a:p>
+            <a:pPr algn="l"/>
+            <a:r>
+              <a:rPr sz="1600"/>
+              <a:t>작업/로그/승인 이력 저장용 서버 또는 DB</a:t>
+            </a:r>
+          </a:p>
+        </p:txBody>
+      </p:sp>
+    </p:spTree>
+  </p:cSld>
+  <p:clrMapOvr>
+    <a:masterClrMapping/>
+  </p:clrMapOvr>
+</p:sld>
+</file>
+
+<file path=ppt/slides/slide19.xml><?xml version="1.0" encoding="utf-8"?>
+<p:sld xmlns:a="http://schemas.openxmlformats.org/drawingml/2006/main" xmlns:p="http://schemas.openxmlformats.org/presentationml/2006/main" xmlns:r="http://schemas.openxmlformats.org/officeDocument/2006/relationships">
+  <p:cSld>
+    <p:spTree>
+      <p:nvGrpSpPr>
+        <p:cNvPr id="1" name=""/>
+        <p:cNvGrpSpPr/>
+        <p:nvPr/>
+      </p:nvGrpSpPr>
+      <p:grpSpPr/>
+      <p:sp>
+        <p:nvSpPr>
+          <p:cNvPr id="2" name="Title 1"/>
+          <p:cNvSpPr>
+            <a:spLocks noGrp="1"/>
+          </p:cNvSpPr>
+          <p:nvPr>
+            <p:ph type="title"/>
+          </p:nvPr>
+        </p:nvSpPr>
+        <p:spPr/>
+        <p:txBody>
+          <a:bodyPr/>
+          <a:lstStyle/>
+          <a:p>
+            <a:r>
+              <a:t>9. PPT 1장 발표용 요약 문구 (1/3)</a:t>
+            </a:r>
+          </a:p>
+        </p:txBody>
+      </p:sp>
+      <p:sp>
+        <p:nvSpPr>
+          <p:cNvPr id="3" name="Content Placeholder 2"/>
+          <p:cNvSpPr>
+            <a:spLocks noGrp="1"/>
+          </p:cNvSpPr>
+          <p:nvPr>
+            <p:ph idx="1"/>
+          </p:nvPr>
+        </p:nvSpPr>
+        <p:spPr/>
+        <p:txBody>
+          <a:bodyPr wrap="square"/>
+          <a:lstStyle/>
+          <a:p>
+            <a:pPr algn="l"/>
+            <a:r>
+              <a:rPr sz="1600"/>
+              <a:t>### 제목</a:t>
+            </a:r>
+          </a:p>
+          <a:p>
+            <a:pPr algn="l"/>
+            <a:r>
+              <a:rPr sz="1600"/>
+              <a:t>외부망 연계 AI 개발지원 시스템 구축 검토안</a:t>
+            </a:r>
+          </a:p>
+          <a:p>
+            <a:pPr algn="l"/>
+            <a:r>
+              <a:rPr sz="1600"/>
+              <a:t>### 배경</a:t>
+            </a:r>
+          </a:p>
+          <a:p>
+            <a:pPr algn="l"/>
+            <a:r>
+              <a:rPr sz="1600"/>
+              <a:t>반복적인 코드 리뷰, 테스트 확인, 브랜치 작업 부담 증가</a:t>
+            </a:r>
+          </a:p>
+          <a:p>
+            <a:pPr algn="l"/>
+            <a:r>
+              <a:rPr sz="1600"/>
+              <a:t>GPU 서버 기반 내부 AI보다 빠른 도입 가능</a:t>
+            </a:r>
+          </a:p>
+          <a:p>
+            <a:pPr algn="l"/>
+            <a:r>
+              <a:rPr sz="1600"/>
+              <a:t>외부 상용 AI 활용 시 최신 모델 접근 가능</a:t>
+            </a:r>
+          </a:p>
+          <a:p>
+            <a:pPr algn="l"/>
+            <a:r>
+              <a:rPr sz="1600"/>
+              <a:t>### 제안 내용</a:t>
+            </a:r>
+          </a:p>
+          <a:p>
+            <a:pPr algn="l"/>
+            <a:r>
+              <a:rPr sz="1600"/>
+              <a:t>Owner AI: 코드 수정 / 테스트 / PR 생성 지원</a:t>
+            </a:r>
+          </a:p>
+          <a:p>
+            <a:pPr algn="l"/>
+            <a:r>
+              <a:rPr sz="1600"/>
+              <a:t>Reviewer AI: 변경사항 검토 / 승인·반려 판단 지원</a:t>
+            </a:r>
+          </a:p>
+          <a:p>
+            <a:pPr algn="l"/>
+            <a:r>
+              <a:rPr sz="1600"/>
+              <a:t>내부 Git / Jenkins 연동</a:t>
             </a:r>
           </a:p>
         </p:txBody>
@@ -3266,372 +4220,1123 @@
       <p:grpSpPr/>
       <p:sp>
         <p:nvSpPr>
-          <p:cNvPr id="2" name="TextBox 1"/>
-          <p:cNvSpPr txBox="1"/>
-          <p:nvPr/>
-        </p:nvSpPr>
-        <p:spPr>
-          <a:xfrm>
-            <a:off x="457200" y="274320"/>
-            <a:ext cx="11247120" cy="640080"/>
-          </a:xfrm>
-          <a:prstGeom prst="rect">
-            <a:avLst/>
-          </a:prstGeom>
-          <a:noFill/>
-        </p:spPr>
-        <p:txBody>
-          <a:bodyPr wrap="none">
-            <a:spAutoFit/>
-          </a:bodyPr>
-          <a:lstStyle/>
-          <a:p>
-            <a:pPr>
-              <a:defRPr sz="2600" b="1">
-                <a:solidFill>
-                  <a:srgbClr val="1F4E79"/>
-                </a:solidFill>
-              </a:defRPr>
-            </a:pPr>
-            <a:r>
-              <a:t>권장 인프라 구성</a:t>
-            </a:r>
-          </a:p>
-        </p:txBody>
-      </p:sp>
-      <p:sp>
-        <p:nvSpPr>
-          <p:cNvPr id="3" name="Rounded Rectangle 2"/>
-          <p:cNvSpPr/>
-          <p:nvPr/>
-        </p:nvSpPr>
-        <p:spPr>
-          <a:xfrm>
-            <a:off x="640080" y="2194560"/>
-            <a:ext cx="2011680" cy="914400"/>
-          </a:xfrm>
-          <a:prstGeom prst="roundRect">
-            <a:avLst/>
-          </a:prstGeom>
-          <a:solidFill>
-            <a:srgbClr val="EBF1DE"/>
-          </a:solidFill>
-          <a:ln>
-            <a:solidFill>
-              <a:srgbClr val="1F4E79"/>
-            </a:solidFill>
-          </a:ln>
-        </p:spPr>
-        <p:style>
-          <a:lnRef idx="1">
-            <a:schemeClr val="accent1"/>
-          </a:lnRef>
-          <a:fillRef idx="3">
-            <a:schemeClr val="accent1"/>
-          </a:fillRef>
-          <a:effectRef idx="2">
-            <a:schemeClr val="accent1"/>
-          </a:effectRef>
-          <a:fontRef idx="minor">
-            <a:schemeClr val="lt1"/>
-          </a:fontRef>
-        </p:style>
-        <p:txBody>
-          <a:bodyPr rtlCol="0" anchor="ctr"/>
-          <a:lstStyle/>
-          <a:p>
-            <a:pPr algn="ctr">
-              <a:defRPr sz="1600" b="1">
-                <a:solidFill>
-                  <a:srgbClr val="000000"/>
-                </a:solidFill>
-              </a:defRPr>
-            </a:pPr>
-            <a:r>
-              <a:t>개발자 / 요청자</a:t>
-            </a:r>
-          </a:p>
-        </p:txBody>
-      </p:sp>
-      <p:sp>
-        <p:nvSpPr>
-          <p:cNvPr id="4" name="Rounded Rectangle 3"/>
-          <p:cNvSpPr/>
-          <p:nvPr/>
-        </p:nvSpPr>
-        <p:spPr>
-          <a:xfrm>
-            <a:off x="3108960" y="1645920"/>
-            <a:ext cx="2377440" cy="1097280"/>
-          </a:xfrm>
-          <a:prstGeom prst="roundRect">
-            <a:avLst/>
-          </a:prstGeom>
-          <a:solidFill>
-            <a:srgbClr val="F4B183"/>
-          </a:solidFill>
-          <a:ln>
-            <a:solidFill>
-              <a:srgbClr val="1F4E79"/>
-            </a:solidFill>
-          </a:ln>
-        </p:spPr>
-        <p:style>
-          <a:lnRef idx="1">
-            <a:schemeClr val="accent1"/>
-          </a:lnRef>
-          <a:fillRef idx="3">
-            <a:schemeClr val="accent1"/>
-          </a:fillRef>
-          <a:effectRef idx="2">
-            <a:schemeClr val="accent1"/>
-          </a:effectRef>
-          <a:fontRef idx="minor">
-            <a:schemeClr val="lt1"/>
-          </a:fontRef>
-        </p:style>
-        <p:txBody>
-          <a:bodyPr rtlCol="0" anchor="ctr"/>
-          <a:lstStyle/>
-          <a:p>
-            <a:pPr algn="ctr">
-              <a:defRPr sz="1600" b="1">
-                <a:solidFill>
-                  <a:srgbClr val="000000"/>
-                </a:solidFill>
-              </a:defRPr>
-            </a:pPr>
-            <a:r>
-              <a:t>오케스트레이터</a:t>
-            </a:r>
-            <a:br/>
-            <a:r>
-              <a:t>Task / Allocator / Audit</a:t>
-            </a:r>
-          </a:p>
-        </p:txBody>
-      </p:sp>
-      <p:sp>
-        <p:nvSpPr>
-          <p:cNvPr id="5" name="Rounded Rectangle 4"/>
-          <p:cNvSpPr/>
-          <p:nvPr/>
-        </p:nvSpPr>
-        <p:spPr>
-          <a:xfrm>
-            <a:off x="1828800" y="3840480"/>
-            <a:ext cx="2743200" cy="1280160"/>
-          </a:xfrm>
-          <a:prstGeom prst="roundRect">
-            <a:avLst/>
-          </a:prstGeom>
-          <a:solidFill>
-            <a:srgbClr val="E6E6E6"/>
-          </a:solidFill>
-          <a:ln>
-            <a:solidFill>
-              <a:srgbClr val="1F4E79"/>
-            </a:solidFill>
-          </a:ln>
-        </p:spPr>
-        <p:style>
-          <a:lnRef idx="1">
-            <a:schemeClr val="accent1"/>
-          </a:lnRef>
-          <a:fillRef idx="3">
-            <a:schemeClr val="accent1"/>
-          </a:fillRef>
-          <a:effectRef idx="2">
-            <a:schemeClr val="accent1"/>
-          </a:effectRef>
-          <a:fontRef idx="minor">
-            <a:schemeClr val="lt1"/>
-          </a:fontRef>
-        </p:style>
-        <p:txBody>
-          <a:bodyPr rtlCol="0" anchor="ctr"/>
-          <a:lstStyle/>
-          <a:p>
-            <a:pPr algn="ctr">
-              <a:defRPr sz="1600" b="1">
-                <a:solidFill>
-                  <a:srgbClr val="000000"/>
-                </a:solidFill>
-              </a:defRPr>
-            </a:pPr>
-            <a:r>
-              <a:t>CPU 서버</a:t>
-            </a:r>
-            <a:br/>
-            <a:r>
-              <a:t>Git + Jenkins + Orchestrator</a:t>
-            </a:r>
-          </a:p>
-        </p:txBody>
-      </p:sp>
-      <p:sp>
-        <p:nvSpPr>
-          <p:cNvPr id="6" name="Rounded Rectangle 5"/>
-          <p:cNvSpPr/>
-          <p:nvPr/>
-        </p:nvSpPr>
-        <p:spPr>
-          <a:xfrm>
-            <a:off x="6675120" y="3566160"/>
-            <a:ext cx="3657600" cy="1371600"/>
-          </a:xfrm>
-          <a:prstGeom prst="roundRect">
-            <a:avLst/>
-          </a:prstGeom>
-          <a:solidFill>
-            <a:srgbClr val="EBF1DE"/>
-          </a:solidFill>
-          <a:ln>
-            <a:solidFill>
-              <a:srgbClr val="1F4E79"/>
-            </a:solidFill>
-          </a:ln>
-        </p:spPr>
-        <p:style>
-          <a:lnRef idx="1">
-            <a:schemeClr val="accent1"/>
-          </a:lnRef>
-          <a:fillRef idx="3">
-            <a:schemeClr val="accent1"/>
-          </a:fillRef>
-          <a:effectRef idx="2">
-            <a:schemeClr val="accent1"/>
-          </a:effectRef>
-          <a:fontRef idx="minor">
-            <a:schemeClr val="lt1"/>
-          </a:fontRef>
-        </p:style>
-        <p:txBody>
-          <a:bodyPr rtlCol="0" anchor="ctr"/>
-          <a:lstStyle/>
-          <a:p>
-            <a:pPr algn="ctr">
-              <a:defRPr sz="1600" b="1">
-                <a:solidFill>
-                  <a:srgbClr val="000000"/>
-                </a:solidFill>
-              </a:defRPr>
-            </a:pPr>
-            <a:r>
-              <a:t>외부 AI API / SaaS</a:t>
-            </a:r>
-            <a:br/>
-            <a:r>
-              <a:t>OpenAI / Copilot 등</a:t>
-            </a:r>
-          </a:p>
-        </p:txBody>
-      </p:sp>
-      <p:cxnSp>
-        <p:nvCxnSpPr>
-          <p:cNvPr id="7" name="Connector 6"/>
-          <p:cNvCxnSpPr/>
-          <p:nvPr/>
-        </p:nvCxnSpPr>
-        <p:spPr>
-          <a:xfrm flipV="1">
-            <a:off x="2651760" y="2194560"/>
-            <a:ext cx="457200" cy="457200"/>
-          </a:xfrm>
-          <a:prstGeom prst="line">
-            <a:avLst/>
-          </a:prstGeom>
-          <a:ln w="25400">
-            <a:solidFill>
-              <a:srgbClr val="1F4E79"/>
-            </a:solidFill>
-          </a:ln>
-        </p:spPr>
-        <p:style>
-          <a:lnRef idx="2">
-            <a:schemeClr val="accent1"/>
-          </a:lnRef>
-          <a:fillRef idx="0">
-            <a:schemeClr val="accent1"/>
-          </a:fillRef>
-          <a:effectRef idx="1">
-            <a:schemeClr val="accent1"/>
-          </a:effectRef>
-          <a:fontRef idx="minor">
-            <a:schemeClr val="tx1"/>
-          </a:fontRef>
-        </p:style>
-      </p:cxnSp>
-      <p:cxnSp>
-        <p:nvCxnSpPr>
-          <p:cNvPr id="8" name="Connector 7"/>
-          <p:cNvCxnSpPr/>
-          <p:nvPr/>
-        </p:nvCxnSpPr>
-        <p:spPr>
-          <a:xfrm flipH="1">
-            <a:off x="3291840" y="2743200"/>
-            <a:ext cx="1005840" cy="1097280"/>
-          </a:xfrm>
-          <a:prstGeom prst="line">
-            <a:avLst/>
-          </a:prstGeom>
-          <a:ln w="25400">
-            <a:solidFill>
-              <a:srgbClr val="1F4E79"/>
-            </a:solidFill>
-          </a:ln>
-        </p:spPr>
-        <p:style>
-          <a:lnRef idx="2">
-            <a:schemeClr val="accent1"/>
-          </a:lnRef>
-          <a:fillRef idx="0">
-            <a:schemeClr val="accent1"/>
-          </a:fillRef>
-          <a:effectRef idx="1">
-            <a:schemeClr val="accent1"/>
-          </a:effectRef>
-          <a:fontRef idx="minor">
-            <a:schemeClr val="tx1"/>
-          </a:fontRef>
-        </p:style>
-      </p:cxnSp>
-      <p:cxnSp>
-        <p:nvCxnSpPr>
-          <p:cNvPr id="9" name="Connector 8"/>
-          <p:cNvCxnSpPr/>
-          <p:nvPr/>
-        </p:nvCxnSpPr>
-        <p:spPr>
-          <a:xfrm>
-            <a:off x="5486400" y="2194560"/>
-            <a:ext cx="1188720" cy="1737360"/>
-          </a:xfrm>
-          <a:prstGeom prst="line">
-            <a:avLst/>
-          </a:prstGeom>
-          <a:ln w="25400">
-            <a:solidFill>
-              <a:srgbClr val="1F4E79"/>
-            </a:solidFill>
-          </a:ln>
-        </p:spPr>
-        <p:style>
-          <a:lnRef idx="2">
-            <a:schemeClr val="accent1"/>
-          </a:lnRef>
-          <a:fillRef idx="0">
-            <a:schemeClr val="accent1"/>
-          </a:fillRef>
-          <a:effectRef idx="1">
-            <a:schemeClr val="accent1"/>
-          </a:effectRef>
-          <a:fontRef idx="minor">
-            <a:schemeClr val="tx1"/>
-          </a:fontRef>
-        </p:style>
-      </p:cxnSp>
+          <p:cNvPr id="2" name="Title 1"/>
+          <p:cNvSpPr>
+            <a:spLocks noGrp="1"/>
+          </p:cNvSpPr>
+          <p:nvPr>
+            <p:ph type="title"/>
+          </p:nvPr>
+        </p:nvSpPr>
+        <p:spPr/>
+        <p:txBody>
+          <a:bodyPr/>
+          <a:lstStyle/>
+          <a:p>
+            <a:r>
+              <a:t>1. 시스템 소개 (1/2)</a:t>
+            </a:r>
+          </a:p>
+        </p:txBody>
+      </p:sp>
+      <p:sp>
+        <p:nvSpPr>
+          <p:cNvPr id="3" name="Content Placeholder 2"/>
+          <p:cNvSpPr>
+            <a:spLocks noGrp="1"/>
+          </p:cNvSpPr>
+          <p:nvPr>
+            <p:ph idx="1"/>
+          </p:nvPr>
+        </p:nvSpPr>
+        <p:spPr/>
+        <p:txBody>
+          <a:bodyPr wrap="square"/>
+          <a:lstStyle/>
+          <a:p>
+            <a:pPr algn="l"/>
+            <a:r>
+              <a:rPr sz="1600"/>
+              <a:t>본 검토안은 **내부 Git/Jenkins는 유지하되, AI 모델은 외부망 API 또는 외부 서비스와 연계**하여 사용하는 개발지원 시스템 구축 제안입니다.</a:t>
+            </a:r>
+          </a:p>
+          <a:p>
+            <a:pPr algn="l"/>
+            <a:r>
+              <a:rPr sz="1600"/>
+              <a:t>구성 개념:</a:t>
+            </a:r>
+          </a:p>
+          <a:p>
+            <a:pPr algn="l"/>
+            <a:r>
+              <a:rPr sz="1600"/>
+              <a:t>**Owner AI**: 코드 수정, 테스트 실행, PR 생성 지원</a:t>
+            </a:r>
+          </a:p>
+          <a:p>
+            <a:pPr algn="l"/>
+            <a:r>
+              <a:rPr sz="1600"/>
+              <a:t>**Reviewer AI**: 변경사항 검토, 테스트 결과 확인, 승인/반려 판단 지원</a:t>
+            </a:r>
+          </a:p>
+          <a:p>
+            <a:pPr algn="l"/>
+            <a:r>
+              <a:rPr sz="1600"/>
+              <a:t>**Orchestrator**: 작업 배정, workspace 할당, 상태 관리, 감사 로그 저장</a:t>
+            </a:r>
+          </a:p>
+          <a:p>
+            <a:pPr algn="l"/>
+            <a:r>
+              <a:rPr sz="1600"/>
+              <a:t>**내부 Git / Jenkins 연동**: branch/PR 기준 빌드 및 테스트 자동화</a:t>
+            </a:r>
+          </a:p>
+          <a:p>
+            <a:pPr algn="l"/>
+            <a:r>
+              <a:rPr sz="1600"/>
+              <a:t>**외부 AI 서비스 연계**: OpenAI API, GitHub Copilot Business 등 외부 서비스 활용 가능</a:t>
+            </a:r>
+          </a:p>
+          <a:p>
+            <a:pPr algn="l"/>
+            <a:r>
+              <a:rPr sz="1600"/>
+              <a:t>운영 전제:</a:t>
+            </a:r>
+          </a:p>
+          <a:p>
+            <a:pPr algn="l"/>
+            <a:r>
+              <a:rPr sz="1600"/>
+              <a:t>내부 Git/Jenkins는 사내에 유지</a:t>
+            </a:r>
+          </a:p>
+          <a:p>
+            <a:pPr algn="l"/>
+            <a:r>
+              <a:rPr sz="1600"/>
+              <a:t>AI 관련 요청만 외부망 연동</a:t>
+            </a:r>
+          </a:p>
+        </p:txBody>
+      </p:sp>
+    </p:spTree>
+  </p:cSld>
+  <p:clrMapOvr>
+    <a:masterClrMapping/>
+  </p:clrMapOvr>
+</p:sld>
+</file>
+
+<file path=ppt/slides/slide20.xml><?xml version="1.0" encoding="utf-8"?>
+<p:sld xmlns:a="http://schemas.openxmlformats.org/drawingml/2006/main" xmlns:p="http://schemas.openxmlformats.org/presentationml/2006/main" xmlns:r="http://schemas.openxmlformats.org/officeDocument/2006/relationships">
+  <p:cSld>
+    <p:spTree>
+      <p:nvGrpSpPr>
+        <p:cNvPr id="1" name=""/>
+        <p:cNvGrpSpPr/>
+        <p:nvPr/>
+      </p:nvGrpSpPr>
+      <p:grpSpPr/>
+      <p:sp>
+        <p:nvSpPr>
+          <p:cNvPr id="2" name="Title 1"/>
+          <p:cNvSpPr>
+            <a:spLocks noGrp="1"/>
+          </p:cNvSpPr>
+          <p:nvPr>
+            <p:ph type="title"/>
+          </p:nvPr>
+        </p:nvSpPr>
+        <p:spPr/>
+        <p:txBody>
+          <a:bodyPr/>
+          <a:lstStyle/>
+          <a:p>
+            <a:r>
+              <a:t>9. PPT 1장 발표용 요약 문구 (2/3)</a:t>
+            </a:r>
+          </a:p>
+        </p:txBody>
+      </p:sp>
+      <p:sp>
+        <p:nvSpPr>
+          <p:cNvPr id="3" name="Content Placeholder 2"/>
+          <p:cNvSpPr>
+            <a:spLocks noGrp="1"/>
+          </p:cNvSpPr>
+          <p:nvPr>
+            <p:ph idx="1"/>
+          </p:nvPr>
+        </p:nvSpPr>
+        <p:spPr/>
+        <p:txBody>
+          <a:bodyPr wrap="square"/>
+          <a:lstStyle/>
+          <a:p>
+            <a:pPr algn="l"/>
+            <a:r>
+              <a:rPr sz="1600"/>
+              <a:t>외부 AI API 또는 SaaS 연계</a:t>
+            </a:r>
+          </a:p>
+          <a:p>
+            <a:pPr algn="l"/>
+            <a:r>
+              <a:rPr sz="1600"/>
+              <a:t>### 기대 효과</a:t>
+            </a:r>
+          </a:p>
+          <a:p>
+            <a:pPr algn="l"/>
+            <a:r>
+              <a:rPr sz="1600"/>
+              <a:t>초기 구축비 절감</a:t>
+            </a:r>
+          </a:p>
+          <a:p>
+            <a:pPr algn="l"/>
+            <a:r>
+              <a:rPr sz="1600"/>
+              <a:t>도입 속도 향상</a:t>
+            </a:r>
+          </a:p>
+          <a:p>
+            <a:pPr algn="l"/>
+            <a:r>
+              <a:rPr sz="1600"/>
+              <a:t>최신 모델 활용 가능</a:t>
+            </a:r>
+          </a:p>
+          <a:p>
+            <a:pPr algn="l"/>
+            <a:r>
+              <a:rPr sz="1600"/>
+              <a:t>### 비용</a:t>
+            </a:r>
+          </a:p>
+          <a:p>
+            <a:pPr algn="l"/>
+            <a:r>
+              <a:rPr sz="1600"/>
+              <a:t>초기 구축비: **2,500만 ~ 5,300만원**</a:t>
+            </a:r>
+          </a:p>
+          <a:p>
+            <a:pPr algn="l"/>
+            <a:r>
+              <a:rPr sz="1600"/>
+              <a:t>월간 인프라 운영비: **50만 ~ 120만원**</a:t>
+            </a:r>
+          </a:p>
+          <a:p>
+            <a:pPr algn="l"/>
+            <a:r>
+              <a:rPr sz="1600"/>
+              <a:t>외부 AI 사용료: **좌석형 또는 사용량형 별도**</a:t>
+            </a:r>
+          </a:p>
+          <a:p>
+            <a:pPr algn="l"/>
+            <a:r>
+              <a:rPr sz="1600"/>
+              <a:t>### 제안</a:t>
+            </a:r>
+          </a:p>
+        </p:txBody>
+      </p:sp>
+    </p:spTree>
+  </p:cSld>
+  <p:clrMapOvr>
+    <a:masterClrMapping/>
+  </p:clrMapOvr>
+</p:sld>
+</file>
+
+<file path=ppt/slides/slide21.xml><?xml version="1.0" encoding="utf-8"?>
+<p:sld xmlns:a="http://schemas.openxmlformats.org/drawingml/2006/main" xmlns:p="http://schemas.openxmlformats.org/presentationml/2006/main" xmlns:r="http://schemas.openxmlformats.org/officeDocument/2006/relationships">
+  <p:cSld>
+    <p:spTree>
+      <p:nvGrpSpPr>
+        <p:cNvPr id="1" name=""/>
+        <p:cNvGrpSpPr/>
+        <p:nvPr/>
+      </p:nvGrpSpPr>
+      <p:grpSpPr/>
+      <p:sp>
+        <p:nvSpPr>
+          <p:cNvPr id="2" name="Title 1"/>
+          <p:cNvSpPr>
+            <a:spLocks noGrp="1"/>
+          </p:cNvSpPr>
+          <p:nvPr>
+            <p:ph type="title"/>
+          </p:nvPr>
+        </p:nvSpPr>
+        <p:spPr/>
+        <p:txBody>
+          <a:bodyPr/>
+          <a:lstStyle/>
+          <a:p>
+            <a:r>
+              <a:t>9. PPT 1장 발표용 요약 문구 (3/3)</a:t>
+            </a:r>
+          </a:p>
+        </p:txBody>
+      </p:sp>
+      <p:sp>
+        <p:nvSpPr>
+          <p:cNvPr id="3" name="Content Placeholder 2"/>
+          <p:cNvSpPr>
+            <a:spLocks noGrp="1"/>
+          </p:cNvSpPr>
+          <p:nvPr>
+            <p:ph idx="1"/>
+          </p:nvPr>
+        </p:nvSpPr>
+        <p:spPr/>
+        <p:txBody>
+          <a:bodyPr wrap="square"/>
+          <a:lstStyle/>
+          <a:p>
+            <a:pPr algn="l"/>
+            <a:r>
+              <a:rPr sz="1600"/>
+              <a:t>CPU 서버 1대 + 내부 Git/Jenkins 유지</a:t>
+            </a:r>
+          </a:p>
+          <a:p>
+            <a:pPr algn="l"/>
+            <a:r>
+              <a:rPr sz="1600"/>
+              <a:t>저장소 1개, 팀 1개 기준 MVP부터 단계 도입 검토</a:t>
+            </a:r>
+          </a:p>
+          <a:p>
+            <a:pPr algn="l"/>
+            <a:r>
+              <a:rPr sz="1600"/>
+              <a:t>데이터 반출 범위 통제 정책을 전제로 진행</a:t>
+            </a:r>
+          </a:p>
+          <a:p>
+            <a:pPr algn="l"/>
+            <a:r>
+              <a:rPr sz="1600"/>
+              <a:t>### 회의용 한 줄</a:t>
+            </a:r>
+          </a:p>
+          <a:p>
+            <a:pPr algn="l"/>
+            <a:r>
+              <a:rPr sz="1600"/>
+              <a:t>외부망 연계형은 초기 구축비가 낮고 빠르게 도입할 수 있지만, **외부 AI 사용료와 소스 전송 범위 통제**가 핵심 조건입니다.</a:t>
+            </a:r>
+          </a:p>
+        </p:txBody>
+      </p:sp>
+    </p:spTree>
+  </p:cSld>
+  <p:clrMapOvr>
+    <a:masterClrMapping/>
+  </p:clrMapOvr>
+</p:sld>
+</file>
+
+<file path=ppt/slides/slide22.xml><?xml version="1.0" encoding="utf-8"?>
+<p:sld xmlns:a="http://schemas.openxmlformats.org/drawingml/2006/main" xmlns:p="http://schemas.openxmlformats.org/presentationml/2006/main" xmlns:r="http://schemas.openxmlformats.org/officeDocument/2006/relationships">
+  <p:cSld>
+    <p:spTree>
+      <p:nvGrpSpPr>
+        <p:cNvPr id="1" name=""/>
+        <p:cNvGrpSpPr/>
+        <p:nvPr/>
+      </p:nvGrpSpPr>
+      <p:grpSpPr/>
+      <p:sp>
+        <p:nvSpPr>
+          <p:cNvPr id="2" name="Title 1"/>
+          <p:cNvSpPr>
+            <a:spLocks noGrp="1"/>
+          </p:cNvSpPr>
+          <p:nvPr>
+            <p:ph type="title"/>
+          </p:nvPr>
+        </p:nvSpPr>
+        <p:spPr/>
+        <p:txBody>
+          <a:bodyPr/>
+          <a:lstStyle/>
+          <a:p>
+            <a:r>
+              <a:t>10. 추진 일정표 (1/2)</a:t>
+            </a:r>
+          </a:p>
+        </p:txBody>
+      </p:sp>
+      <p:sp>
+        <p:nvSpPr>
+          <p:cNvPr id="3" name="Content Placeholder 2"/>
+          <p:cNvSpPr>
+            <a:spLocks noGrp="1"/>
+          </p:cNvSpPr>
+          <p:nvPr>
+            <p:ph idx="1"/>
+          </p:nvPr>
+        </p:nvSpPr>
+        <p:spPr/>
+        <p:txBody>
+          <a:bodyPr wrap="square"/>
+          <a:lstStyle/>
+          <a:p>
+            <a:pPr algn="l"/>
+            <a:r>
+              <a:rPr sz="1600"/>
+              <a:t>### 2주 MVP 일정표</a:t>
+            </a:r>
+          </a:p>
+          <a:p>
+            <a:pPr algn="l"/>
+            <a:r>
+              <a:rPr sz="1600"/>
+              <a:t>| 주차 | 작업 내용 | 산출물 |</a:t>
+            </a:r>
+          </a:p>
+          <a:p>
+            <a:pPr algn="l"/>
+            <a:r>
+              <a:rPr sz="1600"/>
+              <a:t>|---|---|---|</a:t>
+            </a:r>
+          </a:p>
+          <a:p>
+            <a:pPr algn="l"/>
+            <a:r>
+              <a:rPr sz="1600"/>
+              <a:t>| 1주차 | CPU 서버 준비, Git/Jenkins 연동, 외부 AI API 연결, Reviewer 기능 구현 | 리뷰 결과 생성 가능 |</a:t>
+            </a:r>
+          </a:p>
+          <a:p>
+            <a:pPr algn="l"/>
+            <a:r>
+              <a:rPr sz="1600"/>
+              <a:t>| 2주차 | Owner 기능 추가, branch 작업, PR 생성, 승인/반려 루프 연결 | 저장소 1개 기준 MVP 동작 |</a:t>
+            </a:r>
+          </a:p>
+          <a:p>
+            <a:pPr algn="l"/>
+            <a:r>
+              <a:rPr sz="1600"/>
+              <a:t>### 4주 확장 일정표</a:t>
+            </a:r>
+          </a:p>
+          <a:p>
+            <a:pPr algn="l"/>
+            <a:r>
+              <a:rPr sz="1600"/>
+              <a:t>| 주차 | 작업 내용 | 산출물 |</a:t>
+            </a:r>
+          </a:p>
+          <a:p>
+            <a:pPr algn="l"/>
+            <a:r>
+              <a:rPr sz="1600"/>
+              <a:t>|---|---|---|</a:t>
+            </a:r>
+          </a:p>
+          <a:p>
+            <a:pPr algn="l"/>
+            <a:r>
+              <a:rPr sz="1600"/>
+              <a:t>| 1주차 | CPU 서버/네트워크 정책 정리, Git/Jenkins 연동 | 기본 인프라 준비 |</a:t>
+            </a:r>
+          </a:p>
+          <a:p>
+            <a:pPr algn="l"/>
+            <a:r>
+              <a:rPr sz="1600"/>
+              <a:t>| 2주차 | Reviewer 도입, diff/test 기반 리뷰 | Reviewer MVP |</a:t>
+            </a:r>
+          </a:p>
+        </p:txBody>
+      </p:sp>
+    </p:spTree>
+  </p:cSld>
+  <p:clrMapOvr>
+    <a:masterClrMapping/>
+  </p:clrMapOvr>
+</p:sld>
+</file>
+
+<file path=ppt/slides/slide23.xml><?xml version="1.0" encoding="utf-8"?>
+<p:sld xmlns:a="http://schemas.openxmlformats.org/drawingml/2006/main" xmlns:p="http://schemas.openxmlformats.org/presentationml/2006/main" xmlns:r="http://schemas.openxmlformats.org/officeDocument/2006/relationships">
+  <p:cSld>
+    <p:spTree>
+      <p:nvGrpSpPr>
+        <p:cNvPr id="1" name=""/>
+        <p:cNvGrpSpPr/>
+        <p:nvPr/>
+      </p:nvGrpSpPr>
+      <p:grpSpPr/>
+      <p:sp>
+        <p:nvSpPr>
+          <p:cNvPr id="2" name="Title 1"/>
+          <p:cNvSpPr>
+            <a:spLocks noGrp="1"/>
+          </p:cNvSpPr>
+          <p:nvPr>
+            <p:ph type="title"/>
+          </p:nvPr>
+        </p:nvSpPr>
+        <p:spPr/>
+        <p:txBody>
+          <a:bodyPr/>
+          <a:lstStyle/>
+          <a:p>
+            <a:r>
+              <a:t>10. 추진 일정표 (2/2)</a:t>
+            </a:r>
+          </a:p>
+        </p:txBody>
+      </p:sp>
+      <p:sp>
+        <p:nvSpPr>
+          <p:cNvPr id="3" name="Content Placeholder 2"/>
+          <p:cNvSpPr>
+            <a:spLocks noGrp="1"/>
+          </p:cNvSpPr>
+          <p:nvPr>
+            <p:ph idx="1"/>
+          </p:nvPr>
+        </p:nvSpPr>
+        <p:spPr/>
+        <p:txBody>
+          <a:bodyPr wrap="square"/>
+          <a:lstStyle/>
+          <a:p>
+            <a:pPr algn="l"/>
+            <a:r>
+              <a:rPr sz="1600"/>
+              <a:t>| 3주차 | Owner 도입, branch 수정/test/push/PR 생성 | Owner MVP |</a:t>
+            </a:r>
+          </a:p>
+          <a:p>
+            <a:pPr algn="l"/>
+            <a:r>
+              <a:rPr sz="1600"/>
+              <a:t>| 4주차 | workspace allocator, 감사 로그, 운영 화면 정리 | 팀 단위 시범 운영 가능 |</a:t>
+            </a:r>
+          </a:p>
+        </p:txBody>
+      </p:sp>
+    </p:spTree>
+  </p:cSld>
+  <p:clrMapOvr>
+    <a:masterClrMapping/>
+  </p:clrMapOvr>
+</p:sld>
+</file>
+
+<file path=ppt/slides/slide24.xml><?xml version="1.0" encoding="utf-8"?>
+<p:sld xmlns:a="http://schemas.openxmlformats.org/drawingml/2006/main" xmlns:p="http://schemas.openxmlformats.org/presentationml/2006/main" xmlns:r="http://schemas.openxmlformats.org/officeDocument/2006/relationships">
+  <p:cSld>
+    <p:spTree>
+      <p:nvGrpSpPr>
+        <p:cNvPr id="1" name=""/>
+        <p:cNvGrpSpPr/>
+        <p:nvPr/>
+      </p:nvGrpSpPr>
+      <p:grpSpPr/>
+      <p:sp>
+        <p:nvSpPr>
+          <p:cNvPr id="2" name="Title 1"/>
+          <p:cNvSpPr>
+            <a:spLocks noGrp="1"/>
+          </p:cNvSpPr>
+          <p:nvPr>
+            <p:ph type="title"/>
+          </p:nvPr>
+        </p:nvSpPr>
+        <p:spPr/>
+        <p:txBody>
+          <a:bodyPr/>
+          <a:lstStyle/>
+          <a:p>
+            <a:r>
+              <a:t>11. 요청 사항</a:t>
+            </a:r>
+          </a:p>
+        </p:txBody>
+      </p:sp>
+      <p:sp>
+        <p:nvSpPr>
+          <p:cNvPr id="3" name="Content Placeholder 2"/>
+          <p:cNvSpPr>
+            <a:spLocks noGrp="1"/>
+          </p:cNvSpPr>
+          <p:nvPr>
+            <p:ph idx="1"/>
+          </p:nvPr>
+        </p:nvSpPr>
+        <p:spPr/>
+        <p:txBody>
+          <a:bodyPr wrap="square"/>
+          <a:lstStyle/>
+          <a:p>
+            <a:pPr algn="l"/>
+            <a:r>
+              <a:rPr sz="1600"/>
+              <a:t>외부망 연계 AI 개발지원 시스템 구축 가능 여부 검토</a:t>
+            </a:r>
+          </a:p>
+          <a:p>
+            <a:pPr algn="l"/>
+            <a:r>
+              <a:rPr sz="1600"/>
+              <a:t>CPU 서버 1대 기준 예산 검토</a:t>
+            </a:r>
+          </a:p>
+          <a:p>
+            <a:pPr algn="l"/>
+            <a:r>
+              <a:rPr sz="1600"/>
+              <a:t>저장소 1개 / 팀 1개 기준 MVP 시범 도입 검토</a:t>
+            </a:r>
+          </a:p>
+          <a:p>
+            <a:pPr algn="l"/>
+            <a:r>
+              <a:rPr sz="1600"/>
+              <a:t>외부 AI 서비스 계약/연동 방식 협의</a:t>
+            </a:r>
+          </a:p>
+          <a:p>
+            <a:pPr algn="l"/>
+            <a:r>
+              <a:rPr sz="1600"/>
+              <a:t>데이터 전송 범위 및 운영 주체 지정</a:t>
+            </a:r>
+          </a:p>
+        </p:txBody>
+      </p:sp>
+    </p:spTree>
+  </p:cSld>
+  <p:clrMapOvr>
+    <a:masterClrMapping/>
+  </p:clrMapOvr>
+</p:sld>
+</file>
+
+<file path=ppt/slides/slide25.xml><?xml version="1.0" encoding="utf-8"?>
+<p:sld xmlns:a="http://schemas.openxmlformats.org/drawingml/2006/main" xmlns:p="http://schemas.openxmlformats.org/presentationml/2006/main" xmlns:r="http://schemas.openxmlformats.org/officeDocument/2006/relationships">
+  <p:cSld>
+    <p:spTree>
+      <p:nvGrpSpPr>
+        <p:cNvPr id="1" name=""/>
+        <p:cNvGrpSpPr/>
+        <p:nvPr/>
+      </p:nvGrpSpPr>
+      <p:grpSpPr/>
+      <p:sp>
+        <p:nvSpPr>
+          <p:cNvPr id="2" name="Title 1"/>
+          <p:cNvSpPr>
+            <a:spLocks noGrp="1"/>
+          </p:cNvSpPr>
+          <p:nvPr>
+            <p:ph type="title"/>
+          </p:nvPr>
+        </p:nvSpPr>
+        <p:spPr/>
+        <p:txBody>
+          <a:bodyPr/>
+          <a:lstStyle/>
+          <a:p>
+            <a:r>
+              <a:t>12. AI 모델/서비스 비교</a:t>
+            </a:r>
+          </a:p>
+        </p:txBody>
+      </p:sp>
+      <p:sp>
+        <p:nvSpPr>
+          <p:cNvPr id="3" name="Content Placeholder 2"/>
+          <p:cNvSpPr>
+            <a:spLocks noGrp="1"/>
+          </p:cNvSpPr>
+          <p:nvPr>
+            <p:ph idx="1"/>
+          </p:nvPr>
+        </p:nvSpPr>
+        <p:spPr/>
+        <p:txBody>
+          <a:bodyPr wrap="square"/>
+          <a:lstStyle/>
+          <a:p>
+            <a:pPr algn="l"/>
+            <a:r>
+              <a:rPr sz="1600"/>
+              <a:t>| 구분 | 장점 | 단점 | 외부망 연계 적합성 | 권장 용도 |</a:t>
+            </a:r>
+          </a:p>
+          <a:p>
+            <a:pPr algn="l"/>
+            <a:r>
+              <a:rPr sz="1600"/>
+              <a:t>|---|---|---|---|---|</a:t>
+            </a:r>
+          </a:p>
+          <a:p>
+            <a:pPr algn="l"/>
+            <a:r>
+              <a:rPr sz="1600"/>
+              <a:t>| **Claude 계열** | 코드 리뷰/수정 품질이 높고 Owner/Reviewer 구조와 궁합이 좋음 | 완전 폐쇄망 직접 설치는 어렵고 관리형 경로 의존 | **높음** | 코드 리뷰, 패치 초안, 문서/규정 해설 |</a:t>
+            </a:r>
+          </a:p>
+          <a:p>
+            <a:pPr algn="l"/>
+            <a:r>
+              <a:rPr sz="1600"/>
+              <a:t>| **GPT 계열** | 범용 추론, 도구 사용, 코드 생성 품질이 높음 | 사용량 과금과 데이터 전송 범위 통제가 필요 | **높음** | 범용 Owner/Reviewer, 자동화 워크플로우 |</a:t>
+            </a:r>
+          </a:p>
+          <a:p>
+            <a:pPr algn="l"/>
+            <a:r>
+              <a:rPr sz="1600"/>
+              <a:t>| **Gemini 계열** | 긴 컨텍스트와 Google 생태계 연동 강점 | Vertex/Google 기반 운영 전제가 강함 | **높음** | 긴 문서/규격 참조형 작업 |</a:t>
+            </a:r>
+          </a:p>
+          <a:p>
+            <a:pPr algn="l"/>
+            <a:r>
+              <a:rPr sz="1600"/>
+              <a:t>| **GitHub Copilot Business** | 도입이 빠르고 IDE 친화적 | Owner/Reviewer/Orchestrator 구조를 그대로 만들기엔 한계 | **중간** | 개발자 개인 보조, 코드 제안 |</a:t>
+            </a:r>
+          </a:p>
+          <a:p>
+            <a:pPr algn="l"/>
+            <a:r>
+              <a:rPr sz="1600"/>
+              <a:t>현재 목표가 **"이곳과 유사한 Owner / Reviewer 협업 구조"**라면, 외부망 연계형에서는 **Claude / GPT 계열 관리형 모델이 가장 현실적**입니다.</a:t>
+            </a:r>
+          </a:p>
+        </p:txBody>
+      </p:sp>
+    </p:spTree>
+  </p:cSld>
+  <p:clrMapOvr>
+    <a:masterClrMapping/>
+  </p:clrMapOvr>
+</p:sld>
+</file>
+
+<file path=ppt/slides/slide26.xml><?xml version="1.0" encoding="utf-8"?>
+<p:sld xmlns:a="http://schemas.openxmlformats.org/drawingml/2006/main" xmlns:p="http://schemas.openxmlformats.org/presentationml/2006/main" xmlns:r="http://schemas.openxmlformats.org/officeDocument/2006/relationships">
+  <p:cSld>
+    <p:spTree>
+      <p:nvGrpSpPr>
+        <p:cNvPr id="1" name=""/>
+        <p:cNvGrpSpPr/>
+        <p:nvPr/>
+      </p:nvGrpSpPr>
+      <p:grpSpPr/>
+      <p:sp>
+        <p:nvSpPr>
+          <p:cNvPr id="2" name="Title 1"/>
+          <p:cNvSpPr>
+            <a:spLocks noGrp="1"/>
+          </p:cNvSpPr>
+          <p:nvPr>
+            <p:ph type="title"/>
+          </p:nvPr>
+        </p:nvSpPr>
+        <p:spPr/>
+        <p:txBody>
+          <a:bodyPr/>
+          <a:lstStyle/>
+          <a:p>
+            <a:r>
+              <a:t>13. "이곳과 동일한 수준" 구축 가능성 (1/2)</a:t>
+            </a:r>
+          </a:p>
+        </p:txBody>
+      </p:sp>
+      <p:sp>
+        <p:nvSpPr>
+          <p:cNvPr id="3" name="Content Placeholder 2"/>
+          <p:cNvSpPr>
+            <a:spLocks noGrp="1"/>
+          </p:cNvSpPr>
+          <p:nvPr>
+            <p:ph idx="1"/>
+          </p:nvPr>
+        </p:nvSpPr>
+        <p:spPr/>
+        <p:txBody>
+          <a:bodyPr wrap="square"/>
+          <a:lstStyle/>
+          <a:p>
+            <a:pPr algn="l"/>
+            <a:r>
+              <a:rPr sz="1600"/>
+              <a:t>외부망 연계형은 폐쇄망보다 **현재 이곳과 가장 유사한 수준으로 접근 가능한 방식**입니다.</a:t>
+            </a:r>
+          </a:p>
+          <a:p>
+            <a:pPr algn="l"/>
+            <a:r>
+              <a:rPr sz="1600"/>
+              <a:t>### 가능한 것</a:t>
+            </a:r>
+          </a:p>
+          <a:p>
+            <a:pPr algn="l"/>
+            <a:r>
+              <a:rPr sz="1600"/>
+              <a:t>Owner / Reviewer / Orchestrator 구조</a:t>
+            </a:r>
+          </a:p>
+          <a:p>
+            <a:pPr algn="l"/>
+            <a:r>
+              <a:rPr sz="1600"/>
+              <a:t>코드 수정 -&gt; PR 생성 -&gt; 리뷰 루프</a:t>
+            </a:r>
+          </a:p>
+          <a:p>
+            <a:pPr algn="l"/>
+            <a:r>
+              <a:rPr sz="1600"/>
+              <a:t>내부 Git / Jenkins 연동</a:t>
+            </a:r>
+          </a:p>
+          <a:p>
+            <a:pPr algn="l"/>
+            <a:r>
+              <a:rPr sz="1600"/>
+              <a:t>고성능 상용 모델 사용</a:t>
+            </a:r>
+          </a:p>
+          <a:p>
+            <a:pPr algn="l"/>
+            <a:r>
+              <a:rPr sz="1600"/>
+              <a:t>### 여전히 다른 점</a:t>
+            </a:r>
+          </a:p>
+          <a:p>
+            <a:pPr algn="l"/>
+            <a:r>
+              <a:rPr sz="1600"/>
+              <a:t>모델 API 비용이 지속적으로 발생함</a:t>
+            </a:r>
+          </a:p>
+          <a:p>
+            <a:pPr algn="l"/>
+            <a:r>
+              <a:rPr sz="1600"/>
+              <a:t>데이터 전송 범위 통제 정책이 필요함</a:t>
+            </a:r>
+          </a:p>
+          <a:p>
+            <a:pPr algn="l"/>
+            <a:r>
+              <a:rPr sz="1600"/>
+              <a:t>서비스 장애나 정책 변경 영향을 받음</a:t>
+            </a:r>
+          </a:p>
+        </p:txBody>
+      </p:sp>
+    </p:spTree>
+  </p:cSld>
+  <p:clrMapOvr>
+    <a:masterClrMapping/>
+  </p:clrMapOvr>
+</p:sld>
+</file>
+
+<file path=ppt/slides/slide27.xml><?xml version="1.0" encoding="utf-8"?>
+<p:sld xmlns:a="http://schemas.openxmlformats.org/drawingml/2006/main" xmlns:p="http://schemas.openxmlformats.org/presentationml/2006/main" xmlns:r="http://schemas.openxmlformats.org/officeDocument/2006/relationships">
+  <p:cSld>
+    <p:spTree>
+      <p:nvGrpSpPr>
+        <p:cNvPr id="1" name=""/>
+        <p:cNvGrpSpPr/>
+        <p:nvPr/>
+      </p:nvGrpSpPr>
+      <p:grpSpPr/>
+      <p:sp>
+        <p:nvSpPr>
+          <p:cNvPr id="2" name="Title 1"/>
+          <p:cNvSpPr>
+            <a:spLocks noGrp="1"/>
+          </p:cNvSpPr>
+          <p:nvPr>
+            <p:ph type="title"/>
+          </p:nvPr>
+        </p:nvSpPr>
+        <p:spPr/>
+        <p:txBody>
+          <a:bodyPr/>
+          <a:lstStyle/>
+          <a:p>
+            <a:r>
+              <a:t>13. "이곳과 동일한 수준" 구축 가능성 (2/2)</a:t>
+            </a:r>
+          </a:p>
+        </p:txBody>
+      </p:sp>
+      <p:sp>
+        <p:nvSpPr>
+          <p:cNvPr id="3" name="Content Placeholder 2"/>
+          <p:cNvSpPr>
+            <a:spLocks noGrp="1"/>
+          </p:cNvSpPr>
+          <p:nvPr>
+            <p:ph idx="1"/>
+          </p:nvPr>
+        </p:nvSpPr>
+        <p:spPr/>
+        <p:txBody>
+          <a:bodyPr wrap="square"/>
+          <a:lstStyle/>
+          <a:p>
+            <a:pPr algn="l"/>
+            <a:r>
+              <a:rPr sz="1600"/>
+              <a:t>즉,</a:t>
+            </a:r>
+          </a:p>
+          <a:p>
+            <a:pPr algn="l"/>
+            <a:r>
+              <a:rPr sz="1600"/>
+              <a:t>**구조는 거의 유사하게 구현 가능**</a:t>
+            </a:r>
+          </a:p>
+          <a:p>
+            <a:pPr algn="l"/>
+            <a:r>
+              <a:rPr sz="1600"/>
+              <a:t>**모델 품질도 폐쇄망형보다 훨씬 가깝게 맞출 수 있음**</a:t>
+            </a:r>
+          </a:p>
+          <a:p>
+            <a:pPr algn="l"/>
+            <a:r>
+              <a:rPr sz="1600"/>
+              <a:t>다만 보안/비용/통제 측면의 부담이 커집니다.</a:t>
+            </a:r>
+          </a:p>
+        </p:txBody>
+      </p:sp>
+    </p:spTree>
+  </p:cSld>
+  <p:clrMapOvr>
+    <a:masterClrMapping/>
+  </p:clrMapOvr>
+</p:sld>
+</file>
+
+<file path=ppt/slides/slide28.xml><?xml version="1.0" encoding="utf-8"?>
+<p:sld xmlns:a="http://schemas.openxmlformats.org/drawingml/2006/main" xmlns:p="http://schemas.openxmlformats.org/presentationml/2006/main" xmlns:r="http://schemas.openxmlformats.org/officeDocument/2006/relationships">
+  <p:cSld>
+    <p:spTree>
+      <p:nvGrpSpPr>
+        <p:cNvPr id="1" name=""/>
+        <p:cNvGrpSpPr/>
+        <p:nvPr/>
+      </p:nvGrpSpPr>
+      <p:grpSpPr/>
+      <p:sp>
+        <p:nvSpPr>
+          <p:cNvPr id="2" name="Title 1"/>
+          <p:cNvSpPr>
+            <a:spLocks noGrp="1"/>
+          </p:cNvSpPr>
+          <p:nvPr>
+            <p:ph type="title"/>
+          </p:nvPr>
+        </p:nvSpPr>
+        <p:spPr/>
+        <p:txBody>
+          <a:bodyPr/>
+          <a:lstStyle/>
+          <a:p>
+            <a:r>
+              <a:t>14. 권장 첫 번째 성공 사례 (1/2)</a:t>
+            </a:r>
+          </a:p>
+        </p:txBody>
+      </p:sp>
+      <p:sp>
+        <p:nvSpPr>
+          <p:cNvPr id="3" name="Content Placeholder 2"/>
+          <p:cNvSpPr>
+            <a:spLocks noGrp="1"/>
+          </p:cNvSpPr>
+          <p:nvPr>
+            <p:ph idx="1"/>
+          </p:nvPr>
+        </p:nvSpPr>
+        <p:spPr/>
+        <p:txBody>
+          <a:bodyPr wrap="square"/>
+          <a:lstStyle/>
+          <a:p>
+            <a:pPr algn="l"/>
+            <a:r>
+              <a:rPr sz="1600"/>
+              <a:t>외부망 연계형에서도 첫 유즈케이스는 **Reviewer 중심**이 가장 안전합니다.</a:t>
+            </a:r>
+          </a:p>
+          <a:p>
+            <a:pPr algn="l"/>
+            <a:r>
+              <a:rPr sz="1600"/>
+              <a:t>### 권장 1차 유즈케이스</a:t>
+            </a:r>
+          </a:p>
+          <a:p>
+            <a:pPr algn="l"/>
+            <a:r>
+              <a:rPr sz="1600"/>
+              <a:t>입력: PR diff, 테스트 결과, 정적분석 결과</a:t>
+            </a:r>
+          </a:p>
+          <a:p>
+            <a:pPr algn="l"/>
+            <a:r>
+              <a:rPr sz="1600"/>
+              <a:t>출력:</a:t>
+            </a:r>
+          </a:p>
+          <a:p>
+            <a:pPr algn="l"/>
+            <a:r>
+              <a:rPr sz="1600"/>
+              <a:t>원인 설명</a:t>
+            </a:r>
+          </a:p>
+          <a:p>
+            <a:pPr algn="l"/>
+            <a:r>
+              <a:rPr sz="1600"/>
+              <a:t>수정 가이드</a:t>
+            </a:r>
+          </a:p>
+          <a:p>
+            <a:pPr algn="l"/>
+            <a:r>
+              <a:rPr sz="1600"/>
+              <a:t>패치 초안</a:t>
+            </a:r>
+          </a:p>
+          <a:p>
+            <a:pPr algn="l"/>
+            <a:r>
+              <a:rPr sz="1600"/>
+              <a:t>승인/반려 의견</a:t>
+            </a:r>
+          </a:p>
+          <a:p>
+            <a:pPr algn="l"/>
+            <a:r>
+              <a:rPr sz="1600"/>
+              <a:t>### 이유</a:t>
+            </a:r>
+          </a:p>
+          <a:p>
+            <a:pPr algn="l"/>
+            <a:r>
+              <a:rPr sz="1600"/>
+              <a:t>자동 merge보다 안전함</a:t>
+            </a:r>
+          </a:p>
+        </p:txBody>
+      </p:sp>
+    </p:spTree>
+  </p:cSld>
+  <p:clrMapOvr>
+    <a:masterClrMapping/>
+  </p:clrMapOvr>
+</p:sld>
+</file>
+
+<file path=ppt/slides/slide29.xml><?xml version="1.0" encoding="utf-8"?>
+<p:sld xmlns:a="http://schemas.openxmlformats.org/drawingml/2006/main" xmlns:p="http://schemas.openxmlformats.org/presentationml/2006/main" xmlns:r="http://schemas.openxmlformats.org/officeDocument/2006/relationships">
+  <p:cSld>
+    <p:spTree>
+      <p:nvGrpSpPr>
+        <p:cNvPr id="1" name=""/>
+        <p:cNvGrpSpPr/>
+        <p:nvPr/>
+      </p:nvGrpSpPr>
+      <p:grpSpPr/>
+      <p:sp>
+        <p:nvSpPr>
+          <p:cNvPr id="2" name="Title 1"/>
+          <p:cNvSpPr>
+            <a:spLocks noGrp="1"/>
+          </p:cNvSpPr>
+          <p:nvPr>
+            <p:ph type="title"/>
+          </p:nvPr>
+        </p:nvSpPr>
+        <p:spPr/>
+        <p:txBody>
+          <a:bodyPr/>
+          <a:lstStyle/>
+          <a:p>
+            <a:r>
+              <a:t>14. 권장 첫 번째 성공 사례 (2/2)</a:t>
+            </a:r>
+          </a:p>
+        </p:txBody>
+      </p:sp>
+      <p:sp>
+        <p:nvSpPr>
+          <p:cNvPr id="3" name="Content Placeholder 2"/>
+          <p:cNvSpPr>
+            <a:spLocks noGrp="1"/>
+          </p:cNvSpPr>
+          <p:nvPr>
+            <p:ph idx="1"/>
+          </p:nvPr>
+        </p:nvSpPr>
+        <p:spPr/>
+        <p:txBody>
+          <a:bodyPr wrap="square"/>
+          <a:lstStyle/>
+          <a:p>
+            <a:pPr algn="l"/>
+            <a:r>
+              <a:rPr sz="1600"/>
+              <a:t>품질 평가가 쉬움</a:t>
+            </a:r>
+          </a:p>
+          <a:p>
+            <a:pPr algn="l"/>
+            <a:r>
+              <a:rPr sz="1600"/>
+              <a:t>도입 초기에 신뢰를 쌓기 좋음</a:t>
+            </a:r>
+          </a:p>
+          <a:p>
+            <a:pPr algn="l"/>
+            <a:r>
+              <a:rPr sz="1600"/>
+              <a:t>이후 Owner 자동화로 확장하기 쉬움</a:t>
+            </a:r>
+          </a:p>
+        </p:txBody>
+      </p:sp>
     </p:spTree>
   </p:cSld>
   <p:clrMapOvr>
@@ -3652,148 +5357,231 @@
       <p:grpSpPr/>
       <p:sp>
         <p:nvSpPr>
-          <p:cNvPr id="2" name="TextBox 1"/>
-          <p:cNvSpPr txBox="1"/>
-          <p:nvPr/>
-        </p:nvSpPr>
-        <p:spPr>
-          <a:xfrm>
-            <a:off x="457200" y="274320"/>
-            <a:ext cx="11247120" cy="640080"/>
-          </a:xfrm>
-          <a:prstGeom prst="rect">
-            <a:avLst/>
-          </a:prstGeom>
-          <a:noFill/>
-        </p:spPr>
-        <p:txBody>
-          <a:bodyPr wrap="none">
-            <a:spAutoFit/>
-          </a:bodyPr>
-          <a:lstStyle/>
-          <a:p>
-            <a:pPr>
-              <a:defRPr sz="2600" b="1">
-                <a:solidFill>
-                  <a:srgbClr val="1F4E79"/>
-                </a:solidFill>
-              </a:defRPr>
-            </a:pPr>
-            <a:r>
-              <a:t>동작 흐름</a:t>
-            </a:r>
-          </a:p>
-        </p:txBody>
-      </p:sp>
-      <p:sp>
-        <p:nvSpPr>
-          <p:cNvPr id="3" name="TextBox 2"/>
-          <p:cNvSpPr txBox="1"/>
-          <p:nvPr/>
-        </p:nvSpPr>
-        <p:spPr>
-          <a:xfrm>
-            <a:off x="731520" y="1463040"/>
-            <a:ext cx="10515600" cy="4572000"/>
-          </a:xfrm>
-          <a:prstGeom prst="rect">
-            <a:avLst/>
-          </a:prstGeom>
-          <a:noFill/>
-        </p:spPr>
-        <p:txBody>
-          <a:bodyPr wrap="none">
-            <a:spAutoFit/>
-          </a:bodyPr>
-          <a:lstStyle/>
-          <a:p>
-            <a:pPr>
-              <a:spcAft>
-                <a:spcPts val="1000"/>
-              </a:spcAft>
-              <a:defRPr sz="2000">
-                <a:solidFill>
-                  <a:srgbClr val="000000"/>
-                </a:solidFill>
-              </a:defRPr>
-            </a:pPr>
-            <a:r>
-              <a:t>1. 개발자가 작업 생성</a:t>
-            </a:r>
-          </a:p>
-          <a:p>
-            <a:pPr>
-              <a:spcAft>
-                <a:spcPts val="1000"/>
-              </a:spcAft>
-              <a:defRPr sz="2000">
-                <a:solidFill>
-                  <a:srgbClr val="000000"/>
-                </a:solidFill>
-              </a:defRPr>
-            </a:pPr>
-            <a:r>
-              <a:t>2. 오케스트레이터가 workspace 할당</a:t>
-            </a:r>
-          </a:p>
-          <a:p>
-            <a:pPr>
-              <a:spcAft>
-                <a:spcPts val="1000"/>
-              </a:spcAft>
-              <a:defRPr sz="2000">
-                <a:solidFill>
-                  <a:srgbClr val="000000"/>
-                </a:solidFill>
-              </a:defRPr>
-            </a:pPr>
-            <a:r>
-              <a:t>3. Owner AI가 외부 AI 서비스 호출 후 코드 수정</a:t>
-            </a:r>
-          </a:p>
-          <a:p>
-            <a:pPr>
-              <a:spcAft>
-                <a:spcPts val="1000"/>
-              </a:spcAft>
-              <a:defRPr sz="2000">
-                <a:solidFill>
-                  <a:srgbClr val="000000"/>
-                </a:solidFill>
-              </a:defRPr>
-            </a:pPr>
-            <a:r>
-              <a:t>4. 내부 Git 브랜치 push</a:t>
-            </a:r>
-          </a:p>
-          <a:p>
-            <a:pPr>
-              <a:spcAft>
-                <a:spcPts val="1000"/>
-              </a:spcAft>
-              <a:defRPr sz="2000">
-                <a:solidFill>
-                  <a:srgbClr val="000000"/>
-                </a:solidFill>
-              </a:defRPr>
-            </a:pPr>
-            <a:r>
-              <a:t>5. Jenkins 빌드/테스트 실행</a:t>
-            </a:r>
-          </a:p>
-          <a:p>
-            <a:pPr>
-              <a:spcAft>
-                <a:spcPts val="1000"/>
-              </a:spcAft>
-              <a:defRPr sz="2000">
-                <a:solidFill>
-                  <a:srgbClr val="000000"/>
-                </a:solidFill>
-              </a:defRPr>
-            </a:pPr>
-            <a:r>
-              <a:t>6. Reviewer AI가 외부 AI 서비스 호출 후 승인/반려</a:t>
+          <p:cNvPr id="2" name="Title 1"/>
+          <p:cNvSpPr>
+            <a:spLocks noGrp="1"/>
+          </p:cNvSpPr>
+          <p:nvPr>
+            <p:ph type="title"/>
+          </p:nvPr>
+        </p:nvSpPr>
+        <p:spPr/>
+        <p:txBody>
+          <a:bodyPr/>
+          <a:lstStyle/>
+          <a:p>
+            <a:r>
+              <a:t>1. 시스템 소개 (2/2)</a:t>
+            </a:r>
+          </a:p>
+        </p:txBody>
+      </p:sp>
+      <p:sp>
+        <p:nvSpPr>
+          <p:cNvPr id="3" name="Content Placeholder 2"/>
+          <p:cNvSpPr>
+            <a:spLocks noGrp="1"/>
+          </p:cNvSpPr>
+          <p:nvPr>
+            <p:ph idx="1"/>
+          </p:nvPr>
+        </p:nvSpPr>
+        <p:spPr/>
+        <p:txBody>
+          <a:bodyPr wrap="square"/>
+          <a:lstStyle/>
+          <a:p>
+            <a:pPr algn="l"/>
+            <a:r>
+              <a:rPr sz="1600"/>
+              <a:t>소스 전송 범위 및 로그 저장 범위는 별도 정책 필요</a:t>
+            </a:r>
+          </a:p>
+        </p:txBody>
+      </p:sp>
+    </p:spTree>
+  </p:cSld>
+  <p:clrMapOvr>
+    <a:masterClrMapping/>
+  </p:clrMapOvr>
+</p:sld>
+</file>
+
+<file path=ppt/slides/slide30.xml><?xml version="1.0" encoding="utf-8"?>
+<p:sld xmlns:a="http://schemas.openxmlformats.org/drawingml/2006/main" xmlns:p="http://schemas.openxmlformats.org/presentationml/2006/main" xmlns:r="http://schemas.openxmlformats.org/officeDocument/2006/relationships">
+  <p:cSld>
+    <p:spTree>
+      <p:nvGrpSpPr>
+        <p:cNvPr id="1" name=""/>
+        <p:cNvGrpSpPr/>
+        <p:nvPr/>
+      </p:nvGrpSpPr>
+      <p:grpSpPr/>
+      <p:sp>
+        <p:nvSpPr>
+          <p:cNvPr id="2" name="Title 1"/>
+          <p:cNvSpPr>
+            <a:spLocks noGrp="1"/>
+          </p:cNvSpPr>
+          <p:nvPr>
+            <p:ph type="title"/>
+          </p:nvPr>
+        </p:nvSpPr>
+        <p:spPr/>
+        <p:txBody>
+          <a:bodyPr/>
+          <a:lstStyle/>
+          <a:p>
+            <a:r>
+              <a:t>15. 결론 (1/2)</a:t>
+            </a:r>
+          </a:p>
+        </p:txBody>
+      </p:sp>
+      <p:sp>
+        <p:nvSpPr>
+          <p:cNvPr id="3" name="Content Placeholder 2"/>
+          <p:cNvSpPr>
+            <a:spLocks noGrp="1"/>
+          </p:cNvSpPr>
+          <p:nvPr>
+            <p:ph idx="1"/>
+          </p:nvPr>
+        </p:nvSpPr>
+        <p:spPr/>
+        <p:txBody>
+          <a:bodyPr wrap="square"/>
+          <a:lstStyle/>
+          <a:p>
+            <a:pPr algn="l"/>
+            <a:r>
+              <a:rPr sz="1600"/>
+              <a:t>외부망 연계형 AI 개발지원 시스템은</a:t>
+            </a:r>
+          </a:p>
+          <a:p>
+            <a:pPr algn="l"/>
+            <a:r>
+              <a:rPr sz="1600"/>
+              <a:t>**초기 구축비를 낮추고 빠르게 MVP를 시작할 수 있는 방식**입니다.</a:t>
+            </a:r>
+          </a:p>
+          <a:p>
+            <a:pPr algn="l"/>
+            <a:r>
+              <a:rPr sz="1600"/>
+              <a:t>다만 운영 시에는,</a:t>
+            </a:r>
+          </a:p>
+          <a:p>
+            <a:pPr algn="l"/>
+            <a:r>
+              <a:rPr sz="1600"/>
+              <a:t>외부 AI 사용료</a:t>
+            </a:r>
+          </a:p>
+          <a:p>
+            <a:pPr algn="l"/>
+            <a:r>
+              <a:rPr sz="1600"/>
+              <a:t>데이터 반출 범위 통제</a:t>
+            </a:r>
+          </a:p>
+          <a:p>
+            <a:pPr algn="l"/>
+            <a:r>
+              <a:rPr sz="1600"/>
+              <a:t>외부 서비스 의존성</a:t>
+            </a:r>
+          </a:p>
+          <a:p>
+            <a:pPr algn="l"/>
+            <a:r>
+              <a:rPr sz="1600"/>
+              <a:t>을 함께 관리해야 합니다.</a:t>
+            </a:r>
+          </a:p>
+          <a:p>
+            <a:pPr algn="l"/>
+            <a:r>
+              <a:rPr sz="1600"/>
+              <a:t>즉,</a:t>
+            </a:r>
+          </a:p>
+          <a:p>
+            <a:pPr algn="l"/>
+            <a:r>
+              <a:rPr sz="1600"/>
+              <a:t>**초기 비용과 도입 속도가 중요하면 외부망 연계형**</a:t>
+            </a:r>
+          </a:p>
+          <a:p>
+            <a:pPr algn="l"/>
+            <a:r>
+              <a:rPr sz="1600"/>
+              <a:t>**보안 통제와 내부 독립성이 중요하면 폐쇄망 내부형**</a:t>
+            </a:r>
+          </a:p>
+        </p:txBody>
+      </p:sp>
+    </p:spTree>
+  </p:cSld>
+  <p:clrMapOvr>
+    <a:masterClrMapping/>
+  </p:clrMapOvr>
+</p:sld>
+</file>
+
+<file path=ppt/slides/slide31.xml><?xml version="1.0" encoding="utf-8"?>
+<p:sld xmlns:a="http://schemas.openxmlformats.org/drawingml/2006/main" xmlns:p="http://schemas.openxmlformats.org/presentationml/2006/main" xmlns:r="http://schemas.openxmlformats.org/officeDocument/2006/relationships">
+  <p:cSld>
+    <p:spTree>
+      <p:nvGrpSpPr>
+        <p:cNvPr id="1" name=""/>
+        <p:cNvGrpSpPr/>
+        <p:nvPr/>
+      </p:nvGrpSpPr>
+      <p:grpSpPr/>
+      <p:sp>
+        <p:nvSpPr>
+          <p:cNvPr id="2" name="Title 1"/>
+          <p:cNvSpPr>
+            <a:spLocks noGrp="1"/>
+          </p:cNvSpPr>
+          <p:nvPr>
+            <p:ph type="title"/>
+          </p:nvPr>
+        </p:nvSpPr>
+        <p:spPr/>
+        <p:txBody>
+          <a:bodyPr/>
+          <a:lstStyle/>
+          <a:p>
+            <a:r>
+              <a:t>15. 결론 (2/2)</a:t>
+            </a:r>
+          </a:p>
+        </p:txBody>
+      </p:sp>
+      <p:sp>
+        <p:nvSpPr>
+          <p:cNvPr id="3" name="Content Placeholder 2"/>
+          <p:cNvSpPr>
+            <a:spLocks noGrp="1"/>
+          </p:cNvSpPr>
+          <p:nvPr>
+            <p:ph idx="1"/>
+          </p:nvPr>
+        </p:nvSpPr>
+        <p:spPr/>
+        <p:txBody>
+          <a:bodyPr wrap="square"/>
+          <a:lstStyle/>
+          <a:p>
+            <a:pPr algn="l"/>
+            <a:r>
+              <a:rPr sz="1600"/>
+              <a:t>으로 구분해서 판단하는 것이 적절합니다.</a:t>
             </a:r>
           </a:p>
         </p:txBody>
@@ -3818,479 +5606,83 @@
       <p:grpSpPr/>
       <p:sp>
         <p:nvSpPr>
-          <p:cNvPr id="2" name="TextBox 1"/>
-          <p:cNvSpPr txBox="1"/>
-          <p:nvPr/>
-        </p:nvSpPr>
-        <p:spPr>
-          <a:xfrm>
-            <a:off x="457200" y="274320"/>
-            <a:ext cx="11247120" cy="640080"/>
-          </a:xfrm>
-          <a:prstGeom prst="rect">
-            <a:avLst/>
-          </a:prstGeom>
-          <a:noFill/>
-        </p:spPr>
-        <p:txBody>
-          <a:bodyPr wrap="none">
-            <a:spAutoFit/>
-          </a:bodyPr>
-          <a:lstStyle/>
-          <a:p>
-            <a:pPr>
-              <a:defRPr sz="2600" b="1">
-                <a:solidFill>
-                  <a:srgbClr val="1F4E79"/>
-                </a:solidFill>
-              </a:defRPr>
-            </a:pPr>
-            <a:r>
-              <a:t>비용 요약 (외부망 연계형)</a:t>
-            </a:r>
-          </a:p>
-        </p:txBody>
-      </p:sp>
-      <p:graphicFrame>
-        <p:nvGraphicFramePr>
-          <p:cNvPr id="3" name="Table 2"/>
-          <p:cNvGraphicFramePr>
-            <a:graphicFrameLocks noGrp="1"/>
-          </p:cNvGraphicFramePr>
-          <p:nvPr/>
-        </p:nvGraphicFramePr>
-        <p:xfrm>
-          <a:off x="457200" y="1463040"/>
-          <a:ext cx="11247120" cy="4114800"/>
-        </p:xfrm>
-        <a:graphic>
-          <a:graphicData uri="http://schemas.openxmlformats.org/drawingml/2006/table">
-            <a:tbl>
-              <a:tblPr firstRow="1" bandRow="1">
-                <a:tableStyleId>{5C22544A-7EE6-4342-B048-85BDC9FD1C3A}</a:tableStyleId>
-              </a:tblPr>
-              <a:tblGrid>
-                <a:gridCol w="3749040"/>
-                <a:gridCol w="3749040"/>
-                <a:gridCol w="3749040"/>
-              </a:tblGrid>
-              <a:tr h="587828">
-                <a:tc>
-                  <a:txBody>
-                    <a:bodyPr/>
-                    <a:lstStyle/>
-                    <a:p>
-                      <a:pPr algn="ctr">
-                        <a:defRPr sz="1400" b="1"/>
-                      </a:pPr>
-                      <a:r>
-                        <a:t>항목</a:t>
-                      </a:r>
-                    </a:p>
-                  </a:txBody>
-                  <a:tcPr>
-                    <a:solidFill>
-                      <a:srgbClr val="E6E6E6"/>
-                    </a:solidFill>
-                  </a:tcPr>
-                </a:tc>
-                <a:tc>
-                  <a:txBody>
-                    <a:bodyPr/>
-                    <a:lstStyle/>
-                    <a:p>
-                      <a:pPr algn="ctr">
-                        <a:defRPr sz="1400" b="1"/>
-                      </a:pPr>
-                      <a:r>
-                        <a:t>예상 비용</a:t>
-                      </a:r>
-                    </a:p>
-                  </a:txBody>
-                  <a:tcPr>
-                    <a:solidFill>
-                      <a:srgbClr val="E6E6E6"/>
-                    </a:solidFill>
-                  </a:tcPr>
-                </a:tc>
-                <a:tc>
-                  <a:txBody>
-                    <a:bodyPr/>
-                    <a:lstStyle/>
-                    <a:p>
-                      <a:pPr algn="ctr">
-                        <a:defRPr sz="1400" b="1"/>
-                      </a:pPr>
-                      <a:r>
-                        <a:t>비고</a:t>
-                      </a:r>
-                    </a:p>
-                  </a:txBody>
-                  <a:tcPr>
-                    <a:solidFill>
-                      <a:srgbClr val="E6E6E6"/>
-                    </a:solidFill>
-                  </a:tcPr>
-                </a:tc>
-              </a:tr>
-              <a:tr h="587828">
-                <a:tc>
-                  <a:txBody>
-                    <a:bodyPr/>
-                    <a:lstStyle/>
-                    <a:p>
-                      <a:pPr algn="l">
-                        <a:defRPr sz="1300" b="0"/>
-                      </a:pPr>
-                      <a:r>
-                        <a:t>CPU 서버</a:t>
-                      </a:r>
-                    </a:p>
-                  </a:txBody>
-                  <a:tcPr>
-                    <a:solidFill>
-                      <a:srgbClr val="FFFFFF"/>
-                    </a:solidFill>
-                  </a:tcPr>
-                </a:tc>
-                <a:tc>
-                  <a:txBody>
-                    <a:bodyPr/>
-                    <a:lstStyle/>
-                    <a:p>
-                      <a:pPr algn="l">
-                        <a:defRPr sz="1300" b="0"/>
-                      </a:pPr>
-                      <a:r>
-                        <a:t>700만 ~ 1,500만원</a:t>
-                      </a:r>
-                    </a:p>
-                  </a:txBody>
-                  <a:tcPr>
-                    <a:solidFill>
-                      <a:srgbClr val="FFFFFF"/>
-                    </a:solidFill>
-                  </a:tcPr>
-                </a:tc>
-                <a:tc>
-                  <a:txBody>
-                    <a:bodyPr/>
-                    <a:lstStyle/>
-                    <a:p>
-                      <a:pPr algn="l">
-                        <a:defRPr sz="1300" b="0"/>
-                      </a:pPr>
-                      <a:r>
-                        <a:t>Git + Jenkins + Orchestrator</a:t>
-                      </a:r>
-                    </a:p>
-                  </a:txBody>
-                  <a:tcPr>
-                    <a:solidFill>
-                      <a:srgbClr val="FFFFFF"/>
-                    </a:solidFill>
-                  </a:tcPr>
-                </a:tc>
-              </a:tr>
-              <a:tr h="587828">
-                <a:tc>
-                  <a:txBody>
-                    <a:bodyPr/>
-                    <a:lstStyle/>
-                    <a:p>
-                      <a:pPr algn="l">
-                        <a:defRPr sz="1300" b="0"/>
-                      </a:pPr>
-                      <a:r>
-                        <a:t>스토리지/UPS</a:t>
-                      </a:r>
-                    </a:p>
-                  </a:txBody>
-                  <a:tcPr>
-                    <a:solidFill>
-                      <a:srgbClr val="FFFFFF"/>
-                    </a:solidFill>
-                  </a:tcPr>
-                </a:tc>
-                <a:tc>
-                  <a:txBody>
-                    <a:bodyPr/>
-                    <a:lstStyle/>
-                    <a:p>
-                      <a:pPr algn="l">
-                        <a:defRPr sz="1300" b="0"/>
-                      </a:pPr>
-                      <a:r>
-                        <a:t>300만 ~ 800만원</a:t>
-                      </a:r>
-                    </a:p>
-                  </a:txBody>
-                  <a:tcPr>
-                    <a:solidFill>
-                      <a:srgbClr val="FFFFFF"/>
-                    </a:solidFill>
-                  </a:tcPr>
-                </a:tc>
-                <a:tc>
-                  <a:txBody>
-                    <a:bodyPr/>
-                    <a:lstStyle/>
-                    <a:p>
-                      <a:pPr algn="l">
-                        <a:defRPr sz="1300" b="0"/>
-                      </a:pPr>
-                      <a:r>
-                        <a:t>백업/보호 장비</a:t>
-                      </a:r>
-                    </a:p>
-                  </a:txBody>
-                  <a:tcPr>
-                    <a:solidFill>
-                      <a:srgbClr val="FFFFFF"/>
-                    </a:solidFill>
-                  </a:tcPr>
-                </a:tc>
-              </a:tr>
-              <a:tr h="587828">
-                <a:tc>
-                  <a:txBody>
-                    <a:bodyPr/>
-                    <a:lstStyle/>
-                    <a:p>
-                      <a:pPr algn="l">
-                        <a:defRPr sz="1300" b="0"/>
-                      </a:pPr>
-                      <a:r>
-                        <a:t>총 초기 구축비</a:t>
-                      </a:r>
-                    </a:p>
-                  </a:txBody>
-                  <a:tcPr>
-                    <a:solidFill>
-                      <a:srgbClr val="FFFFFF"/>
-                    </a:solidFill>
-                  </a:tcPr>
-                </a:tc>
-                <a:tc>
-                  <a:txBody>
-                    <a:bodyPr/>
-                    <a:lstStyle/>
-                    <a:p>
-                      <a:pPr algn="l">
-                        <a:defRPr sz="1300" b="0"/>
-                      </a:pPr>
-                      <a:r>
-                        <a:t>2,550만 ~ 5,500만원</a:t>
-                      </a:r>
-                    </a:p>
-                  </a:txBody>
-                  <a:tcPr>
-                    <a:solidFill>
-                      <a:srgbClr val="FFFFFF"/>
-                    </a:solidFill>
-                  </a:tcPr>
-                </a:tc>
-                <a:tc>
-                  <a:txBody>
-                    <a:bodyPr/>
-                    <a:lstStyle/>
-                    <a:p>
-                      <a:pPr algn="l">
-                        <a:defRPr sz="1300" b="0"/>
-                      </a:pPr>
-                      <a:r>
-                        <a:t>세부 견적 합산 예시</a:t>
-                      </a:r>
-                    </a:p>
-                  </a:txBody>
-                  <a:tcPr>
-                    <a:solidFill>
-                      <a:srgbClr val="FFFFFF"/>
-                    </a:solidFill>
-                  </a:tcPr>
-                </a:tc>
-              </a:tr>
-              <a:tr h="587828">
-                <a:tc>
-                  <a:txBody>
-                    <a:bodyPr/>
-                    <a:lstStyle/>
-                    <a:p>
-                      <a:pPr algn="l">
-                        <a:defRPr sz="1300" b="0"/>
-                      </a:pPr>
-                      <a:r>
-                        <a:t>Copilot Business</a:t>
-                      </a:r>
-                    </a:p>
-                  </a:txBody>
-                  <a:tcPr>
-                    <a:solidFill>
-                      <a:srgbClr val="FFFFFF"/>
-                    </a:solidFill>
-                  </a:tcPr>
-                </a:tc>
-                <a:tc>
-                  <a:txBody>
-                    <a:bodyPr/>
-                    <a:lstStyle/>
-                    <a:p>
-                      <a:pPr algn="l">
-                        <a:defRPr sz="1300" b="0"/>
-                      </a:pPr>
-                      <a:r>
-                        <a:t>$19 / 사용자 / 월</a:t>
-                      </a:r>
-                    </a:p>
-                  </a:txBody>
-                  <a:tcPr>
-                    <a:solidFill>
-                      <a:srgbClr val="FFFFFF"/>
-                    </a:solidFill>
-                  </a:tcPr>
-                </a:tc>
-                <a:tc>
-                  <a:txBody>
-                    <a:bodyPr/>
-                    <a:lstStyle/>
-                    <a:p>
-                      <a:pPr algn="l">
-                        <a:defRPr sz="1300" b="0"/>
-                      </a:pPr>
-                      <a:r>
-                        <a:t>좌석형 과금</a:t>
-                      </a:r>
-                    </a:p>
-                  </a:txBody>
-                  <a:tcPr>
-                    <a:solidFill>
-                      <a:srgbClr val="FFFFFF"/>
-                    </a:solidFill>
-                  </a:tcPr>
-                </a:tc>
-              </a:tr>
-              <a:tr h="587828">
-                <a:tc>
-                  <a:txBody>
-                    <a:bodyPr/>
-                    <a:lstStyle/>
-                    <a:p>
-                      <a:pPr algn="l">
-                        <a:defRPr sz="1300" b="0"/>
-                      </a:pPr>
-                      <a:r>
-                        <a:t>OpenAI GPT-5.4</a:t>
-                      </a:r>
-                    </a:p>
-                  </a:txBody>
-                  <a:tcPr>
-                    <a:solidFill>
-                      <a:srgbClr val="FFFFFF"/>
-                    </a:solidFill>
-                  </a:tcPr>
-                </a:tc>
-                <a:tc>
-                  <a:txBody>
-                    <a:bodyPr/>
-                    <a:lstStyle/>
-                    <a:p>
-                      <a:pPr algn="l">
-                        <a:defRPr sz="1300" b="0"/>
-                      </a:pPr>
-                      <a:r>
-                        <a:t>입력 $2.50 / 출력 $15 / 1M</a:t>
-                      </a:r>
-                    </a:p>
-                  </a:txBody>
-                  <a:tcPr>
-                    <a:solidFill>
-                      <a:srgbClr val="FFFFFF"/>
-                    </a:solidFill>
-                  </a:tcPr>
-                </a:tc>
-                <a:tc>
-                  <a:txBody>
-                    <a:bodyPr/>
-                    <a:lstStyle/>
-                    <a:p>
-                      <a:pPr algn="l">
-                        <a:defRPr sz="1300" b="0"/>
-                      </a:pPr>
-                      <a:r>
-                        <a:t>사용량 과금</a:t>
-                      </a:r>
-                    </a:p>
-                  </a:txBody>
-                  <a:tcPr>
-                    <a:solidFill>
-                      <a:srgbClr val="FFFFFF"/>
-                    </a:solidFill>
-                  </a:tcPr>
-                </a:tc>
-              </a:tr>
-              <a:tr h="587832">
-                <a:tc>
-                  <a:txBody>
-                    <a:bodyPr/>
-                    <a:lstStyle/>
-                    <a:p>
-                      <a:pPr algn="l">
-                        <a:defRPr sz="1300" b="0"/>
-                      </a:pPr>
-                      <a:r>
-                        <a:t>월간 운영비</a:t>
-                      </a:r>
-                    </a:p>
-                  </a:txBody>
-                  <a:tcPr>
-                    <a:solidFill>
-                      <a:srgbClr val="FFFFFF"/>
-                    </a:solidFill>
-                  </a:tcPr>
-                </a:tc>
-                <a:tc>
-                  <a:txBody>
-                    <a:bodyPr/>
-                    <a:lstStyle/>
-                    <a:p>
-                      <a:pPr algn="l">
-                        <a:defRPr sz="1300" b="0"/>
-                      </a:pPr>
-                      <a:r>
-                        <a:t>50만 ~ 120만원 + 외부 사용료</a:t>
-                      </a:r>
-                    </a:p>
-                  </a:txBody>
-                  <a:tcPr>
-                    <a:solidFill>
-                      <a:srgbClr val="FFFFFF"/>
-                    </a:solidFill>
-                  </a:tcPr>
-                </a:tc>
-                <a:tc>
-                  <a:txBody>
-                    <a:bodyPr/>
-                    <a:lstStyle/>
-                    <a:p>
-                      <a:pPr algn="l">
-                        <a:defRPr sz="1300" b="0"/>
-                      </a:pPr>
-                      <a:r>
-                        <a:t>인프라 + 외부 AI</a:t>
-                      </a:r>
-                    </a:p>
-                  </a:txBody>
-                  <a:tcPr>
-                    <a:solidFill>
-                      <a:srgbClr val="FFFFFF"/>
-                    </a:solidFill>
-                  </a:tcPr>
-                </a:tc>
-              </a:tr>
-            </a:tbl>
-          </a:graphicData>
-        </a:graphic>
-      </p:graphicFrame>
+          <p:cNvPr id="2" name="Title 1"/>
+          <p:cNvSpPr>
+            <a:spLocks noGrp="1"/>
+          </p:cNvSpPr>
+          <p:nvPr>
+            <p:ph type="title"/>
+          </p:nvPr>
+        </p:nvSpPr>
+        <p:spPr/>
+        <p:txBody>
+          <a:bodyPr/>
+          <a:lstStyle/>
+          <a:p>
+            <a:r>
+              <a:t>2. 시스템 시각화</a:t>
+            </a:r>
+          </a:p>
+        </p:txBody>
+      </p:sp>
+      <p:sp>
+        <p:nvSpPr>
+          <p:cNvPr id="3" name="Content Placeholder 2"/>
+          <p:cNvSpPr>
+            <a:spLocks noGrp="1"/>
+          </p:cNvSpPr>
+          <p:nvPr>
+            <p:ph idx="1"/>
+          </p:nvPr>
+        </p:nvSpPr>
+        <p:spPr/>
+        <p:txBody>
+          <a:bodyPr wrap="square"/>
+          <a:lstStyle/>
+          <a:p>
+            <a:pPr algn="l"/>
+            <a:r>
+              <a:rPr sz="1600"/>
+              <a:t>### 2-1. 전체 구성도</a:t>
+            </a:r>
+          </a:p>
+          <a:p>
+            <a:pPr algn="l"/>
+            <a:r>
+              <a:rPr sz="1600"/>
+              <a:t>[Mermaid 다이어그램은 GitHub 이슈 본문 참조]</a:t>
+            </a:r>
+          </a:p>
+          <a:p>
+            <a:pPr algn="l"/>
+            <a:r>
+              <a:rPr sz="1600"/>
+              <a:t>### 2-2. 실제 동작 흐름</a:t>
+            </a:r>
+          </a:p>
+          <a:p>
+            <a:pPr algn="l"/>
+            <a:r>
+              <a:rPr sz="1600"/>
+              <a:t>[Mermaid 다이어그램은 GitHub 이슈 본문 참조]</a:t>
+            </a:r>
+          </a:p>
+          <a:p>
+            <a:pPr algn="l"/>
+            <a:r>
+              <a:rPr sz="1600"/>
+              <a:t>### 2-3. 역할 분리 구조</a:t>
+            </a:r>
+          </a:p>
+          <a:p>
+            <a:pPr algn="l"/>
+            <a:r>
+              <a:rPr sz="1600"/>
+              <a:t>[Mermaid 다이어그램은 GitHub 이슈 본문 참조]</a:t>
+            </a:r>
+          </a:p>
+        </p:txBody>
+      </p:sp>
     </p:spTree>
   </p:cSld>
   <p:clrMapOvr>
@@ -4311,263 +5703,107 @@
       <p:grpSpPr/>
       <p:sp>
         <p:nvSpPr>
-          <p:cNvPr id="2" name="TextBox 1"/>
-          <p:cNvSpPr txBox="1"/>
-          <p:nvPr/>
-        </p:nvSpPr>
-        <p:spPr>
-          <a:xfrm>
-            <a:off x="457200" y="274320"/>
-            <a:ext cx="11247120" cy="640080"/>
-          </a:xfrm>
-          <a:prstGeom prst="rect">
-            <a:avLst/>
-          </a:prstGeom>
-          <a:noFill/>
-        </p:spPr>
-        <p:txBody>
-          <a:bodyPr wrap="none">
-            <a:spAutoFit/>
-          </a:bodyPr>
-          <a:lstStyle/>
-          <a:p>
-            <a:pPr>
-              <a:defRPr sz="2600" b="1">
-                <a:solidFill>
-                  <a:srgbClr val="1F4E79"/>
-                </a:solidFill>
-              </a:defRPr>
-            </a:pPr>
-            <a:r>
-              <a:t>장점 / 리스크</a:t>
-            </a:r>
-          </a:p>
-        </p:txBody>
-      </p:sp>
-      <p:sp>
-        <p:nvSpPr>
-          <p:cNvPr id="3" name="Rounded Rectangle 2"/>
-          <p:cNvSpPr/>
-          <p:nvPr/>
-        </p:nvSpPr>
-        <p:spPr>
-          <a:xfrm>
-            <a:off x="457200" y="1371600"/>
-            <a:ext cx="5120640" cy="4297680"/>
-          </a:xfrm>
-          <a:prstGeom prst="roundRect">
-            <a:avLst/>
-          </a:prstGeom>
-          <a:solidFill>
-            <a:srgbClr val="C6EFCE"/>
-          </a:solidFill>
-          <a:ln>
-            <a:solidFill>
-              <a:srgbClr val="1F4E79"/>
-            </a:solidFill>
-          </a:ln>
-        </p:spPr>
-        <p:style>
-          <a:lnRef idx="1">
-            <a:schemeClr val="accent1"/>
-          </a:lnRef>
-          <a:fillRef idx="3">
-            <a:schemeClr val="accent1"/>
-          </a:fillRef>
-          <a:effectRef idx="2">
-            <a:schemeClr val="accent1"/>
-          </a:effectRef>
-          <a:fontRef idx="minor">
-            <a:schemeClr val="lt1"/>
-          </a:fontRef>
-        </p:style>
-        <p:txBody>
-          <a:bodyPr rtlCol="0" anchor="ctr"/>
-          <a:lstStyle/>
-          <a:p>
-            <a:pPr algn="ctr">
-              <a:defRPr sz="2000" b="1">
-                <a:solidFill>
-                  <a:srgbClr val="1F4E79"/>
-                </a:solidFill>
-              </a:defRPr>
-            </a:pPr>
-            <a:r>
-              <a:t>장점</a:t>
-            </a:r>
-          </a:p>
-          <a:p>
-            <a:pPr>
-              <a:spcAft>
-                <a:spcPts val="600"/>
-              </a:spcAft>
-              <a:defRPr sz="1600">
-                <a:solidFill>
-                  <a:srgbClr val="000000"/>
-                </a:solidFill>
-              </a:defRPr>
-            </a:pPr>
-            <a:r>
-              <a:t>초기 인프라 비용이 낮음</a:t>
-            </a:r>
-          </a:p>
-          <a:p>
-            <a:pPr>
-              <a:spcAft>
-                <a:spcPts val="600"/>
-              </a:spcAft>
-              <a:defRPr sz="1600">
-                <a:solidFill>
-                  <a:srgbClr val="000000"/>
-                </a:solidFill>
-              </a:defRPr>
-            </a:pPr>
-            <a:r>
-              <a:t>GPU 서버 없이 시작 가능</a:t>
-            </a:r>
-          </a:p>
-          <a:p>
-            <a:pPr>
-              <a:spcAft>
-                <a:spcPts val="600"/>
-              </a:spcAft>
-              <a:defRPr sz="1600">
-                <a:solidFill>
-                  <a:srgbClr val="000000"/>
-                </a:solidFill>
-              </a:defRPr>
-            </a:pPr>
-            <a:r>
-              <a:t>최신 상용 모델 즉시 활용</a:t>
-            </a:r>
-          </a:p>
-          <a:p>
-            <a:pPr>
-              <a:spcAft>
-                <a:spcPts val="600"/>
-              </a:spcAft>
-              <a:defRPr sz="1600">
-                <a:solidFill>
-                  <a:srgbClr val="000000"/>
-                </a:solidFill>
-              </a:defRPr>
-            </a:pPr>
-            <a:r>
-              <a:t>도입 속도가 빠름</a:t>
-            </a:r>
-          </a:p>
-        </p:txBody>
-      </p:sp>
-      <p:sp>
-        <p:nvSpPr>
-          <p:cNvPr id="4" name="Rounded Rectangle 3"/>
-          <p:cNvSpPr/>
-          <p:nvPr/>
-        </p:nvSpPr>
-        <p:spPr>
-          <a:xfrm>
-            <a:off x="6035040" y="1371600"/>
-            <a:ext cx="5120640" cy="4297680"/>
-          </a:xfrm>
-          <a:prstGeom prst="roundRect">
-            <a:avLst/>
-          </a:prstGeom>
-          <a:solidFill>
-            <a:srgbClr val="FFC7CE"/>
-          </a:solidFill>
-          <a:ln>
-            <a:solidFill>
-              <a:srgbClr val="1F4E79"/>
-            </a:solidFill>
-          </a:ln>
-        </p:spPr>
-        <p:style>
-          <a:lnRef idx="1">
-            <a:schemeClr val="accent1"/>
-          </a:lnRef>
-          <a:fillRef idx="3">
-            <a:schemeClr val="accent1"/>
-          </a:fillRef>
-          <a:effectRef idx="2">
-            <a:schemeClr val="accent1"/>
-          </a:effectRef>
-          <a:fontRef idx="minor">
-            <a:schemeClr val="lt1"/>
-          </a:fontRef>
-        </p:style>
-        <p:txBody>
-          <a:bodyPr rtlCol="0" anchor="ctr"/>
-          <a:lstStyle/>
-          <a:p>
-            <a:pPr algn="ctr">
-              <a:defRPr sz="2000" b="1">
-                <a:solidFill>
-                  <a:srgbClr val="1F4E79"/>
-                </a:solidFill>
-              </a:defRPr>
-            </a:pPr>
-            <a:r>
-              <a:t>리스크</a:t>
-            </a:r>
-          </a:p>
-          <a:p>
-            <a:pPr>
-              <a:spcAft>
-                <a:spcPts val="600"/>
-              </a:spcAft>
-              <a:defRPr sz="1600">
-                <a:solidFill>
-                  <a:srgbClr val="000000"/>
-                </a:solidFill>
-              </a:defRPr>
-            </a:pPr>
-            <a:r>
-              <a:t>소스/로그 일부 외부 전송 가능</a:t>
-            </a:r>
-          </a:p>
-          <a:p>
-            <a:pPr>
-              <a:spcAft>
-                <a:spcPts val="600"/>
-              </a:spcAft>
-              <a:defRPr sz="1600">
-                <a:solidFill>
-                  <a:srgbClr val="000000"/>
-                </a:solidFill>
-              </a:defRPr>
-            </a:pPr>
-            <a:r>
-              <a:t>월별 사용료 지속 발생</a:t>
-            </a:r>
-          </a:p>
-          <a:p>
-            <a:pPr>
-              <a:spcAft>
-                <a:spcPts val="600"/>
-              </a:spcAft>
-              <a:defRPr sz="1600">
-                <a:solidFill>
-                  <a:srgbClr val="000000"/>
-                </a:solidFill>
-              </a:defRPr>
-            </a:pPr>
-            <a:r>
-              <a:t>외부 서비스 장애 의존성</a:t>
-            </a:r>
-          </a:p>
-          <a:p>
-            <a:pPr>
-              <a:spcAft>
-                <a:spcPts val="600"/>
-              </a:spcAft>
-              <a:defRPr sz="1600">
-                <a:solidFill>
-                  <a:srgbClr val="000000"/>
-                </a:solidFill>
-              </a:defRPr>
-            </a:pPr>
-            <a:r>
-              <a:t>데이터 반출 정책 필요</a:t>
+          <p:cNvPr id="2" name="Title 1"/>
+          <p:cNvSpPr>
+            <a:spLocks noGrp="1"/>
+          </p:cNvSpPr>
+          <p:nvPr>
+            <p:ph type="title"/>
+          </p:nvPr>
+        </p:nvSpPr>
+        <p:spPr/>
+        <p:txBody>
+          <a:bodyPr/>
+          <a:lstStyle/>
+          <a:p>
+            <a:r>
+              <a:t>3. 예상 비용 (1/6)</a:t>
+            </a:r>
+          </a:p>
+        </p:txBody>
+      </p:sp>
+      <p:sp>
+        <p:nvSpPr>
+          <p:cNvPr id="3" name="Content Placeholder 2"/>
+          <p:cNvSpPr>
+            <a:spLocks noGrp="1"/>
+          </p:cNvSpPr>
+          <p:nvPr>
+            <p:ph idx="1"/>
+          </p:nvPr>
+        </p:nvSpPr>
+        <p:spPr/>
+        <p:txBody>
+          <a:bodyPr wrap="square"/>
+          <a:lstStyle/>
+          <a:p>
+            <a:pPr algn="l"/>
+            <a:r>
+              <a:rPr sz="1600"/>
+              <a:t>### 3-1. 초기 구축비(1회)</a:t>
+            </a:r>
+          </a:p>
+          <a:p>
+            <a:pPr algn="l"/>
+            <a:r>
+              <a:rPr sz="1600"/>
+              <a:t>| 항목 | 권장 구성 | 예상 비용 |</a:t>
+            </a:r>
+          </a:p>
+          <a:p>
+            <a:pPr algn="l"/>
+            <a:r>
+              <a:rPr sz="1600"/>
+              <a:t>|---|---|---:|</a:t>
+            </a:r>
+          </a:p>
+          <a:p>
+            <a:pPr algn="l"/>
+            <a:r>
+              <a:rPr sz="1600"/>
+              <a:t>| CPU 서버 | 내부 Git + Jenkins Controller + Orchestrator 운영용 | 700만 ~ 1,500만원 |</a:t>
+            </a:r>
+          </a:p>
+          <a:p>
+            <a:pPr algn="l"/>
+            <a:r>
+              <a:rPr sz="1600"/>
+              <a:t>| 스토리지/백업 | NAS, 백업 스토리지, UPS 등 | 300만 ~ 800만원 |</a:t>
+            </a:r>
+          </a:p>
+          <a:p>
+            <a:pPr algn="l"/>
+            <a:r>
+              <a:rPr sz="1600"/>
+              <a:t>| 구축 인건비 | MVP 2~4주, 연동/운영 화면 포함 | 1,500만 ~ 3,000만원 |</a:t>
+            </a:r>
+          </a:p>
+          <a:p>
+            <a:pPr algn="l"/>
+            <a:r>
+              <a:rPr sz="1600"/>
+              <a:t>| **총 초기 구축비** | **외부망 연계형 기준** | **2,500만 ~ 5,300만원** |</a:t>
+            </a:r>
+          </a:p>
+          <a:p>
+            <a:pPr algn="l"/>
+            <a:r>
+              <a:rPr sz="1600"/>
+              <a:t>### 3-2. 소프트웨어/라이선스 비용</a:t>
+            </a:r>
+          </a:p>
+          <a:p>
+            <a:pPr algn="l"/>
+            <a:r>
+              <a:rPr sz="1600"/>
+              <a:t>| 항목 | 비용 | 비고 |</a:t>
+            </a:r>
+          </a:p>
+          <a:p>
+            <a:pPr algn="l"/>
+            <a:r>
+              <a:rPr sz="1600"/>
+              <a:t>|---|---:|---|</a:t>
             </a:r>
           </a:p>
         </p:txBody>
@@ -4592,133 +5828,482 @@
       <p:grpSpPr/>
       <p:sp>
         <p:nvSpPr>
-          <p:cNvPr id="2" name="TextBox 1"/>
-          <p:cNvSpPr txBox="1"/>
-          <p:nvPr/>
-        </p:nvSpPr>
-        <p:spPr>
-          <a:xfrm>
-            <a:off x="457200" y="274320"/>
-            <a:ext cx="11247120" cy="640080"/>
-          </a:xfrm>
-          <a:prstGeom prst="rect">
-            <a:avLst/>
-          </a:prstGeom>
-          <a:noFill/>
-        </p:spPr>
-        <p:txBody>
-          <a:bodyPr wrap="none">
-            <a:spAutoFit/>
-          </a:bodyPr>
-          <a:lstStyle/>
-          <a:p>
-            <a:pPr>
-              <a:defRPr sz="2600" b="1">
-                <a:solidFill>
-                  <a:srgbClr val="1F4E79"/>
-                </a:solidFill>
-              </a:defRPr>
-            </a:pPr>
-            <a:r>
-              <a:t>권장 도입안</a:t>
-            </a:r>
-          </a:p>
-        </p:txBody>
-      </p:sp>
-      <p:sp>
-        <p:nvSpPr>
-          <p:cNvPr id="3" name="TextBox 2"/>
-          <p:cNvSpPr txBox="1"/>
-          <p:nvPr/>
-        </p:nvSpPr>
-        <p:spPr>
-          <a:xfrm>
-            <a:off x="731520" y="1645920"/>
-            <a:ext cx="10515600" cy="4572000"/>
-          </a:xfrm>
-          <a:prstGeom prst="rect">
-            <a:avLst/>
-          </a:prstGeom>
-          <a:noFill/>
-        </p:spPr>
-        <p:txBody>
-          <a:bodyPr wrap="none">
-            <a:spAutoFit/>
-          </a:bodyPr>
-          <a:lstStyle/>
-          <a:p>
-            <a:pPr>
-              <a:spcAft>
-                <a:spcPts val="1000"/>
-              </a:spcAft>
-              <a:defRPr sz="2200">
-                <a:solidFill>
-                  <a:srgbClr val="000000"/>
-                </a:solidFill>
-              </a:defRPr>
-            </a:pPr>
-            <a:r>
-              <a:t>CPU 서버 1대 + 내부 Git/Jenkins 유지</a:t>
-            </a:r>
-          </a:p>
-          <a:p>
-            <a:pPr>
-              <a:spcAft>
-                <a:spcPts val="1000"/>
-              </a:spcAft>
-              <a:defRPr sz="2200">
-                <a:solidFill>
-                  <a:srgbClr val="000000"/>
-                </a:solidFill>
-              </a:defRPr>
-            </a:pPr>
-            <a:r>
-              <a:t>저장소 1개 / 팀 1개 기준 MVP</a:t>
-            </a:r>
-          </a:p>
-          <a:p>
-            <a:pPr>
-              <a:spcAft>
-                <a:spcPts val="1000"/>
-              </a:spcAft>
-              <a:defRPr sz="2200">
-                <a:solidFill>
-                  <a:srgbClr val="000000"/>
-                </a:solidFill>
-              </a:defRPr>
-            </a:pPr>
-            <a:r>
-              <a:t>데이터 전송 범위 문서화 필수</a:t>
-            </a:r>
-          </a:p>
-          <a:p>
-            <a:pPr>
-              <a:spcAft>
-                <a:spcPts val="1000"/>
-              </a:spcAft>
-              <a:defRPr sz="2200">
-                <a:solidFill>
-                  <a:srgbClr val="000000"/>
-                </a:solidFill>
-              </a:defRPr>
-            </a:pPr>
-            <a:r>
-              <a:t>좌석형/사용량형 비용 통제 정책 필요</a:t>
-            </a:r>
-          </a:p>
-          <a:p>
-            <a:pPr>
-              <a:spcAft>
-                <a:spcPts val="1000"/>
-              </a:spcAft>
-              <a:defRPr sz="2200">
-                <a:solidFill>
-                  <a:srgbClr val="000000"/>
-                </a:solidFill>
-              </a:defRPr>
-            </a:pPr>
-            <a:r>
-              <a:t>기준 문서: GitHub Issue #171</a:t>
+          <p:cNvPr id="2" name="Title 1"/>
+          <p:cNvSpPr>
+            <a:spLocks noGrp="1"/>
+          </p:cNvSpPr>
+          <p:nvPr>
+            <p:ph type="title"/>
+          </p:nvPr>
+        </p:nvSpPr>
+        <p:spPr/>
+        <p:txBody>
+          <a:bodyPr/>
+          <a:lstStyle/>
+          <a:p>
+            <a:r>
+              <a:t>3. 예상 비용 (2/6)</a:t>
+            </a:r>
+          </a:p>
+        </p:txBody>
+      </p:sp>
+      <p:sp>
+        <p:nvSpPr>
+          <p:cNvPr id="3" name="Content Placeholder 2"/>
+          <p:cNvSpPr>
+            <a:spLocks noGrp="1"/>
+          </p:cNvSpPr>
+          <p:nvPr>
+            <p:ph idx="1"/>
+          </p:nvPr>
+        </p:nvSpPr>
+        <p:spPr/>
+        <p:txBody>
+          <a:bodyPr wrap="square"/>
+          <a:lstStyle/>
+          <a:p>
+            <a:pPr algn="l"/>
+            <a:r>
+              <a:rPr sz="1600"/>
+              <a:t>| Jenkins | 0원 | 오픈소스 |</a:t>
+            </a:r>
+          </a:p>
+          <a:p>
+            <a:pPr algn="l"/>
+            <a:r>
+              <a:rPr sz="1600"/>
+              <a:t>| 내부 Git (Gitea Self-Managed) | 0원 | 오픈소스 self-hosted |</a:t>
+            </a:r>
+          </a:p>
+          <a:p>
+            <a:pPr algn="l"/>
+            <a:r>
+              <a:rPr sz="1600"/>
+              <a:t>| 내부 Git (GitLab Self-Managed Free) | 0원부터 | Free 가능, Premium/Ultimate는 별도 좌석 과금 |</a:t>
+            </a:r>
+          </a:p>
+          <a:p>
+            <a:pPr algn="l"/>
+            <a:r>
+              <a:rPr sz="1600"/>
+              <a:t>| GitHub Copilot Business | **$19 / 사용자 / 월** | 공식 좌석 과금 |</a:t>
+            </a:r>
+          </a:p>
+          <a:p>
+            <a:pPr algn="l"/>
+            <a:r>
+              <a:rPr sz="1600"/>
+              <a:t>| OpenAI API (GPT-5.4) | 입력 **$2.50 / 1M tokens**, 출력 **$15 / 1M tokens** | 공식 사용량 과금 |</a:t>
+            </a:r>
+          </a:p>
+          <a:p>
+            <a:pPr algn="l"/>
+            <a:r>
+              <a:rPr sz="1600"/>
+              <a:t>### 3-3. 월간 운영비</a:t>
+            </a:r>
+          </a:p>
+          <a:p>
+            <a:pPr algn="l"/>
+            <a:r>
+              <a:rPr sz="1600"/>
+              <a:t>| 구분 | 예상 비용 |</a:t>
+            </a:r>
+          </a:p>
+          <a:p>
+            <a:pPr algn="l"/>
+            <a:r>
+              <a:rPr sz="1600"/>
+              <a:t>|---|---:|</a:t>
+            </a:r>
+          </a:p>
+          <a:p>
+            <a:pPr algn="l"/>
+            <a:r>
+              <a:rPr sz="1600"/>
+              <a:t>| 인프라 운영비 | 50만 ~ 120만원/월 |</a:t>
+            </a:r>
+          </a:p>
+          <a:p>
+            <a:pPr algn="l"/>
+            <a:r>
+              <a:rPr sz="1600"/>
+              <a:t>| 운영 인력 일부 포함 시 | 200만 ~ 500만원/월 |</a:t>
+            </a:r>
+          </a:p>
+        </p:txBody>
+      </p:sp>
+    </p:spTree>
+  </p:cSld>
+  <p:clrMapOvr>
+    <a:masterClrMapping/>
+  </p:clrMapOvr>
+</p:sld>
+</file>
+
+<file path=ppt/slides/slide7.xml><?xml version="1.0" encoding="utf-8"?>
+<p:sld xmlns:a="http://schemas.openxmlformats.org/drawingml/2006/main" xmlns:p="http://schemas.openxmlformats.org/presentationml/2006/main" xmlns:r="http://schemas.openxmlformats.org/officeDocument/2006/relationships">
+  <p:cSld>
+    <p:spTree>
+      <p:nvGrpSpPr>
+        <p:cNvPr id="1" name=""/>
+        <p:cNvGrpSpPr/>
+        <p:nvPr/>
+      </p:nvGrpSpPr>
+      <p:grpSpPr/>
+      <p:sp>
+        <p:nvSpPr>
+          <p:cNvPr id="2" name="Title 1"/>
+          <p:cNvSpPr>
+            <a:spLocks noGrp="1"/>
+          </p:cNvSpPr>
+          <p:nvPr>
+            <p:ph type="title"/>
+          </p:nvPr>
+        </p:nvSpPr>
+        <p:spPr/>
+        <p:txBody>
+          <a:bodyPr/>
+          <a:lstStyle/>
+          <a:p>
+            <a:r>
+              <a:t>3. 예상 비용 (3/6)</a:t>
+            </a:r>
+          </a:p>
+        </p:txBody>
+      </p:sp>
+      <p:sp>
+        <p:nvSpPr>
+          <p:cNvPr id="3" name="Content Placeholder 2"/>
+          <p:cNvSpPr>
+            <a:spLocks noGrp="1"/>
+          </p:cNvSpPr>
+          <p:nvPr>
+            <p:ph idx="1"/>
+          </p:nvPr>
+        </p:nvSpPr>
+        <p:spPr/>
+        <p:txBody>
+          <a:bodyPr wrap="square"/>
+          <a:lstStyle/>
+          <a:p>
+            <a:pPr algn="l"/>
+            <a:r>
+              <a:rPr sz="1600"/>
+              <a:t>| 외부 AI 사용료 | 사용량/좌석 수에 따라 별도 |</a:t>
+            </a:r>
+          </a:p>
+          <a:p>
+            <a:pPr algn="l"/>
+            <a:r>
+              <a:rPr sz="1600"/>
+              <a:t>### 3-4. 연간 운영비</a:t>
+            </a:r>
+          </a:p>
+          <a:p>
+            <a:pPr algn="l"/>
+            <a:r>
+              <a:rPr sz="1600"/>
+              <a:t>| 구분 | 예상 비용 |</a:t>
+            </a:r>
+          </a:p>
+          <a:p>
+            <a:pPr algn="l"/>
+            <a:r>
+              <a:rPr sz="1600"/>
+              <a:t>|---|---:|</a:t>
+            </a:r>
+          </a:p>
+          <a:p>
+            <a:pPr algn="l"/>
+            <a:r>
+              <a:rPr sz="1600"/>
+              <a:t>| 인프라 운영비 | 600만 ~ 1,440만원/년 |</a:t>
+            </a:r>
+          </a:p>
+          <a:p>
+            <a:pPr algn="l"/>
+            <a:r>
+              <a:rPr sz="1600"/>
+              <a:t>| 운영 인력 일부 포함 시 | 2,400만 ~ 6,000만원/년 |</a:t>
+            </a:r>
+          </a:p>
+          <a:p>
+            <a:pPr algn="l"/>
+            <a:r>
+              <a:rPr sz="1600"/>
+              <a:t>| 외부 AI 사용료 | 사용량/좌석 수에 따라 별도 |</a:t>
+            </a:r>
+          </a:p>
+          <a:p>
+            <a:pPr algn="l"/>
+            <a:r>
+              <a:rPr sz="1600"/>
+              <a:t>### 3-5. 세부 견적 예시</a:t>
+            </a:r>
+          </a:p>
+          <a:p>
+            <a:pPr algn="l"/>
+            <a:r>
+              <a:rPr sz="1600"/>
+              <a:t>| 항목 | 수량 | 단가(예상) | 합계(예상) | 비고 |</a:t>
+            </a:r>
+          </a:p>
+          <a:p>
+            <a:pPr algn="l"/>
+            <a:r>
+              <a:rPr sz="1600"/>
+              <a:t>|---|---:|---:|---:|---|</a:t>
+            </a:r>
+          </a:p>
+        </p:txBody>
+      </p:sp>
+    </p:spTree>
+  </p:cSld>
+  <p:clrMapOvr>
+    <a:masterClrMapping/>
+  </p:clrMapOvr>
+</p:sld>
+</file>
+
+<file path=ppt/slides/slide8.xml><?xml version="1.0" encoding="utf-8"?>
+<p:sld xmlns:a="http://schemas.openxmlformats.org/drawingml/2006/main" xmlns:p="http://schemas.openxmlformats.org/presentationml/2006/main" xmlns:r="http://schemas.openxmlformats.org/officeDocument/2006/relationships">
+  <p:cSld>
+    <p:spTree>
+      <p:nvGrpSpPr>
+        <p:cNvPr id="1" name=""/>
+        <p:cNvGrpSpPr/>
+        <p:nvPr/>
+      </p:nvGrpSpPr>
+      <p:grpSpPr/>
+      <p:sp>
+        <p:nvSpPr>
+          <p:cNvPr id="2" name="Title 1"/>
+          <p:cNvSpPr>
+            <a:spLocks noGrp="1"/>
+          </p:cNvSpPr>
+          <p:nvPr>
+            <p:ph type="title"/>
+          </p:nvPr>
+        </p:nvSpPr>
+        <p:spPr/>
+        <p:txBody>
+          <a:bodyPr/>
+          <a:lstStyle/>
+          <a:p>
+            <a:r>
+              <a:t>3. 예상 비용 (4/6)</a:t>
+            </a:r>
+          </a:p>
+        </p:txBody>
+      </p:sp>
+      <p:sp>
+        <p:nvSpPr>
+          <p:cNvPr id="3" name="Content Placeholder 2"/>
+          <p:cNvSpPr>
+            <a:spLocks noGrp="1"/>
+          </p:cNvSpPr>
+          <p:nvPr>
+            <p:ph idx="1"/>
+          </p:nvPr>
+        </p:nvSpPr>
+        <p:spPr/>
+        <p:txBody>
+          <a:bodyPr wrap="square"/>
+          <a:lstStyle/>
+          <a:p>
+            <a:pPr algn="l"/>
+            <a:r>
+              <a:rPr sz="1600"/>
+              <a:t>| CPU 서버 | 1 | 700만 ~ 1,500만원 | 700만 ~ 1,500만원 | Git + Jenkins + Orchestrator |</a:t>
+            </a:r>
+          </a:p>
+          <a:p>
+            <a:pPr algn="l"/>
+            <a:r>
+              <a:rPr sz="1600"/>
+              <a:t>| NAS/백업 스토리지 | 1식 | 200만 ~ 500만원 | 200만 ~ 500만원 | 백업/감사 로그 저장 |</a:t>
+            </a:r>
+          </a:p>
+          <a:p>
+            <a:pPr algn="l"/>
+            <a:r>
+              <a:rPr sz="1600"/>
+              <a:t>| UPS | 1식 | 100만 ~ 300만원 | 100만 ~ 300만원 | 정전 보호 |</a:t>
+            </a:r>
+          </a:p>
+          <a:p>
+            <a:pPr algn="l"/>
+            <a:r>
+              <a:rPr sz="1600"/>
+              <a:t>| 네트워크/부대자재 | 1식 | 50만 ~ 200만원 | 50만 ~ 200만원 | 방화벽 정책, 케이블, 자재 |</a:t>
+            </a:r>
+          </a:p>
+          <a:p>
+            <a:pPr algn="l"/>
+            <a:r>
+              <a:rPr sz="1600"/>
+              <a:t>| 구축 인건비 | 1식 | 1,500만 ~ 3,000만원 | 1,500만 ~ 3,000만원 | MVP 2~4주 기준 |</a:t>
+            </a:r>
+          </a:p>
+          <a:p>
+            <a:pPr algn="l"/>
+            <a:r>
+              <a:rPr sz="1600"/>
+              <a:t>| **총합** |  |  | **2,550만 ~ 5,500만원** | 세부 견적 합산 예시 |</a:t>
+            </a:r>
+          </a:p>
+          <a:p>
+            <a:pPr algn="l"/>
+            <a:r>
+              <a:rPr sz="1600"/>
+              <a:t>### 3-6. 외부 AI 사용료 예시</a:t>
+            </a:r>
+          </a:p>
+          <a:p>
+            <a:pPr algn="l"/>
+            <a:r>
+              <a:rPr sz="1600"/>
+              <a:t>#### 좌석형 예시</a:t>
+            </a:r>
+          </a:p>
+          <a:p>
+            <a:pPr algn="l"/>
+            <a:r>
+              <a:rPr sz="1600"/>
+              <a:t>**GitHub Copilot Business**: 공식 가격 **$19 / 사용자 / 월**</a:t>
+            </a:r>
+          </a:p>
+          <a:p>
+            <a:pPr algn="l"/>
+            <a:r>
+              <a:rPr sz="1600"/>
+              <a:t>예시: 50명 기준 **$950 / 월**, **$11,400 / 년** + 환율/세금 별도</a:t>
+            </a:r>
+          </a:p>
+        </p:txBody>
+      </p:sp>
+    </p:spTree>
+  </p:cSld>
+  <p:clrMapOvr>
+    <a:masterClrMapping/>
+  </p:clrMapOvr>
+</p:sld>
+</file>
+
+<file path=ppt/slides/slide9.xml><?xml version="1.0" encoding="utf-8"?>
+<p:sld xmlns:a="http://schemas.openxmlformats.org/drawingml/2006/main" xmlns:p="http://schemas.openxmlformats.org/presentationml/2006/main" xmlns:r="http://schemas.openxmlformats.org/officeDocument/2006/relationships">
+  <p:cSld>
+    <p:spTree>
+      <p:nvGrpSpPr>
+        <p:cNvPr id="1" name=""/>
+        <p:cNvGrpSpPr/>
+        <p:nvPr/>
+      </p:nvGrpSpPr>
+      <p:grpSpPr/>
+      <p:sp>
+        <p:nvSpPr>
+          <p:cNvPr id="2" name="Title 1"/>
+          <p:cNvSpPr>
+            <a:spLocks noGrp="1"/>
+          </p:cNvSpPr>
+          <p:nvPr>
+            <p:ph type="title"/>
+          </p:nvPr>
+        </p:nvSpPr>
+        <p:spPr/>
+        <p:txBody>
+          <a:bodyPr/>
+          <a:lstStyle/>
+          <a:p>
+            <a:r>
+              <a:t>3. 예상 비용 (5/6)</a:t>
+            </a:r>
+          </a:p>
+        </p:txBody>
+      </p:sp>
+      <p:sp>
+        <p:nvSpPr>
+          <p:cNvPr id="3" name="Content Placeholder 2"/>
+          <p:cNvSpPr>
+            <a:spLocks noGrp="1"/>
+          </p:cNvSpPr>
+          <p:nvPr>
+            <p:ph idx="1"/>
+          </p:nvPr>
+        </p:nvSpPr>
+        <p:spPr/>
+        <p:txBody>
+          <a:bodyPr wrap="square"/>
+          <a:lstStyle/>
+          <a:p>
+            <a:pPr algn="l"/>
+            <a:r>
+              <a:rPr sz="1600"/>
+              <a:t>#### 사용량형 예시</a:t>
+            </a:r>
+          </a:p>
+          <a:p>
+            <a:pPr algn="l"/>
+            <a:r>
+              <a:rPr sz="1600"/>
+              <a:t>**OpenAI GPT-5.4 공식 가격**</a:t>
+            </a:r>
+          </a:p>
+          <a:p>
+            <a:pPr algn="l"/>
+            <a:r>
+              <a:rPr sz="1600"/>
+              <a:t>입력: **$2.50 / 1M tokens**</a:t>
+            </a:r>
+          </a:p>
+          <a:p>
+            <a:pPr algn="l"/>
+            <a:r>
+              <a:rPr sz="1600"/>
+              <a:t>출력: **$15.00 / 1M tokens**</a:t>
+            </a:r>
+          </a:p>
+          <a:p>
+            <a:pPr algn="l"/>
+            <a:r>
+              <a:rPr sz="1600"/>
+              <a:t>예시: 월 **100M input + 20M output** 사용 시</a:t>
+            </a:r>
+          </a:p>
+          <a:p>
+            <a:pPr algn="l"/>
+            <a:r>
+              <a:rPr sz="1600"/>
+              <a:t>입력 비용: **$250 / 월**</a:t>
+            </a:r>
+          </a:p>
+          <a:p>
+            <a:pPr algn="l"/>
+            <a:r>
+              <a:rPr sz="1600"/>
+              <a:t>출력 비용: **$300 / 월**</a:t>
+            </a:r>
+          </a:p>
+          <a:p>
+            <a:pPr algn="l"/>
+            <a:r>
+              <a:rPr sz="1600"/>
+              <a:t>합계: **$550 / 월**, **$6,600 / 년** + 환율/세금 별도</a:t>
+            </a:r>
+          </a:p>
+          <a:p>
+            <a:pPr algn="l"/>
+            <a:r>
+              <a:rPr sz="1600"/>
+              <a:t>권장안:</a:t>
+            </a:r>
+          </a:p>
+          <a:p>
+            <a:pPr algn="l"/>
+            <a:r>
+              <a:rPr sz="1600"/>
+              <a:t>초기 비용을 줄이려면 **외부망 연계형**이 유리</a:t>
             </a:r>
           </a:p>
         </p:txBody>
